--- a/exports/FE-Credit-IT-Operations-Guide-Slides.pptx
+++ b/exports/FE-Credit-IT-Operations-Guide-Slides.pptx
@@ -37,6 +37,8 @@
     <p:sldId id="285" r:id="rId36"/>
     <p:sldId id="286" r:id="rId37"/>
     <p:sldId id="287" r:id="rId38"/>
+    <p:sldId id="288" r:id="rId39"/>
+    <p:sldId id="289" r:id="rId40"/>
   </p:sldIdLst>
   <p:sldSz cx="12191695" cy="6858000" type="screen4x3"/>
   <p:notesSz cx="6858000" cy="9144000"/>
@@ -4870,67 +4872,824 @@
           <a:lstStyle/>
           <a:p>
             <a:r>
-              <a:t>30-Second Triage Card</a:t>
-            </a:r>
-          </a:p>
-        </p:txBody>
-      </p:sp>
-      <p:sp>
-        <p:nvSpPr>
-          <p:cNvPr id="3" name="Content Placeholder 2"/>
-          <p:cNvSpPr>
-            <a:spLocks noGrp="1"/>
-          </p:cNvSpPr>
-          <p:nvPr>
-            <p:ph idx="1"/>
-          </p:nvPr>
-        </p:nvSpPr>
-        <p:spPr/>
-        <p:txBody>
-          <a:bodyPr/>
-          <a:lstStyle/>
-          <a:p>
-            <a:r>
-              <a:t>Ask in order — stop when answered:</a:t>
-            </a:r>
-          </a:p>
-          <a:p/>
-          <a:p>
-            <a:r>
-              <a:t>1. Is the SYSTEM broken, slow, or access blocked?</a:t>
-            </a:r>
-          </a:p>
-          <a:p>
-            <a:r>
-              <a:t>   YES → IT ticket (Incident or Service Desk)</a:t>
-            </a:r>
-          </a:p>
-          <a:p/>
-          <a:p>
-            <a:r>
-              <a:t>2. Is it CHANGE RULE / CASE / IMPORT / REPORT DEFINITION?</a:t>
-            </a:r>
-          </a:p>
-          <a:p>
-            <a:r>
-              <a:t>   YES → Business bucket → redirect to BRD</a:t>
-            </a:r>
-          </a:p>
-          <a:p/>
-          <a:p>
-            <a:r>
-              <a:t>3. Is it BUILD / ENHANCE / INTEGRATE?</a:t>
-            </a:r>
-          </a:p>
-          <a:p>
-            <a:r>
-              <a:t>   YES → Accepted BRD linked? NO → redirect to BRD first</a:t>
-            </a:r>
-          </a:p>
-          <a:p/>
-          <a:p>
-            <a:r>
-              <a:t>4. Still unsure? → BA 30-min triage call — DO NOT assign to Dev</a:t>
+              <a:t>Flowchart — Ticket Triage Decision</a:t>
+            </a:r>
+          </a:p>
+        </p:txBody>
+      </p:sp>
+      <p:sp>
+        <p:nvSpPr>
+          <p:cNvPr id="3" name="TextBox 2"/>
+          <p:cNvSpPr txBox="1"/>
+          <p:nvPr/>
+        </p:nvSpPr>
+        <p:spPr>
+          <a:xfrm>
+            <a:off x="365760" y="960120"/>
+            <a:ext cx="11430000" cy="320040"/>
+          </a:xfrm>
+          <a:prstGeom prst="rect">
+            <a:avLst/>
+          </a:prstGeom>
+          <a:noFill/>
+        </p:spPr>
+        <p:txBody>
+          <a:bodyPr wrap="none">
+            <a:spAutoFit/>
+          </a:bodyPr>
+          <a:lstStyle/>
+          <a:p>
+            <a:pPr>
+              <a:defRPr sz="1300">
+                <a:solidFill>
+                  <a:srgbClr val="555555"/>
+                </a:solidFill>
+              </a:defRPr>
+            </a:pPr>
+            <a:r>
+              <a:t>Stop at the first Yes — IT executes systems only, never business work</a:t>
+            </a:r>
+          </a:p>
+        </p:txBody>
+      </p:sp>
+      <p:sp>
+        <p:nvSpPr>
+          <p:cNvPr id="4" name="Rounded Rectangle 3"/>
+          <p:cNvSpPr/>
+          <p:nvPr/>
+        </p:nvSpPr>
+        <p:spPr>
+          <a:xfrm>
+            <a:off x="914400" y="1417320"/>
+            <a:ext cx="4206240" cy="731520"/>
+          </a:xfrm>
+          <a:prstGeom prst="roundRect">
+            <a:avLst/>
+          </a:prstGeom>
+          <a:solidFill>
+            <a:srgbClr val="70AD47"/>
+          </a:solidFill>
+          <a:ln>
+            <a:solidFill>
+              <a:srgbClr val="FFFFFF"/>
+            </a:solidFill>
+          </a:ln>
+        </p:spPr>
+        <p:style>
+          <a:lnRef idx="1">
+            <a:schemeClr val="accent1"/>
+          </a:lnRef>
+          <a:fillRef idx="3">
+            <a:schemeClr val="accent1"/>
+          </a:fillRef>
+          <a:effectRef idx="2">
+            <a:schemeClr val="accent1"/>
+          </a:effectRef>
+          <a:fontRef idx="minor">
+            <a:schemeClr val="lt1"/>
+          </a:fontRef>
+        </p:style>
+        <p:txBody>
+          <a:bodyPr rtlCol="0" anchor="ctr" wrap="square"/>
+          <a:lstStyle/>
+          <a:p>
+            <a:pPr algn="l">
+              <a:defRPr sz="1000" b="1">
+                <a:solidFill>
+                  <a:srgbClr val="FFFFFF"/>
+                </a:solidFill>
+              </a:defRPr>
+            </a:pPr>
+            <a:r>
+              <a:t>Request arrives (ITSM catalog)</a:t>
+            </a:r>
+          </a:p>
+        </p:txBody>
+      </p:sp>
+      <p:cxnSp>
+        <p:nvCxnSpPr>
+          <p:cNvPr id="5" name="Connector 4"/>
+          <p:cNvCxnSpPr/>
+          <p:nvPr/>
+        </p:nvCxnSpPr>
+        <p:spPr>
+          <a:xfrm>
+            <a:off x="3017520" y="2148840"/>
+            <a:ext cx="0" cy="283464"/>
+          </a:xfrm>
+          <a:prstGeom prst="line">
+            <a:avLst/>
+          </a:prstGeom>
+          <a:ln w="19050">
+            <a:solidFill>
+              <a:srgbClr val="808080"/>
+            </a:solidFill>
+          </a:ln>
+        </p:spPr>
+        <p:style>
+          <a:lnRef idx="2">
+            <a:schemeClr val="accent1"/>
+          </a:lnRef>
+          <a:fillRef idx="0">
+            <a:schemeClr val="accent1"/>
+          </a:fillRef>
+          <a:effectRef idx="1">
+            <a:schemeClr val="accent1"/>
+          </a:effectRef>
+          <a:fontRef idx="minor">
+            <a:schemeClr val="tx1"/>
+          </a:fontRef>
+        </p:style>
+      </p:cxnSp>
+      <p:sp>
+        <p:nvSpPr>
+          <p:cNvPr id="6" name="Diamond 5"/>
+          <p:cNvSpPr/>
+          <p:nvPr/>
+        </p:nvSpPr>
+        <p:spPr>
+          <a:xfrm>
+            <a:off x="914400" y="2432304"/>
+            <a:ext cx="4206240" cy="731520"/>
+          </a:xfrm>
+          <a:prstGeom prst="diamond">
+            <a:avLst/>
+          </a:prstGeom>
+          <a:solidFill>
+            <a:srgbClr val="ED7D31"/>
+          </a:solidFill>
+          <a:ln>
+            <a:solidFill>
+              <a:srgbClr val="FFFFFF"/>
+            </a:solidFill>
+          </a:ln>
+        </p:spPr>
+        <p:style>
+          <a:lnRef idx="1">
+            <a:schemeClr val="accent1"/>
+          </a:lnRef>
+          <a:fillRef idx="3">
+            <a:schemeClr val="accent1"/>
+          </a:fillRef>
+          <a:effectRef idx="2">
+            <a:schemeClr val="accent1"/>
+          </a:effectRef>
+          <a:fontRef idx="minor">
+            <a:schemeClr val="lt1"/>
+          </a:fontRef>
+        </p:style>
+        <p:txBody>
+          <a:bodyPr rtlCol="0" anchor="ctr" wrap="square"/>
+          <a:lstStyle/>
+          <a:p>
+            <a:pPr algn="l">
+              <a:defRPr sz="1000" b="1">
+                <a:solidFill>
+                  <a:srgbClr val="FFFFFF"/>
+                </a:solidFill>
+              </a:defRPr>
+            </a:pPr>
+            <a:r>
+              <a:t>System broken / slow / access blocked?</a:t>
+            </a:r>
+          </a:p>
+        </p:txBody>
+      </p:sp>
+      <p:cxnSp>
+        <p:nvCxnSpPr>
+          <p:cNvPr id="7" name="Connector 6"/>
+          <p:cNvCxnSpPr/>
+          <p:nvPr/>
+        </p:nvCxnSpPr>
+        <p:spPr>
+          <a:xfrm>
+            <a:off x="3017520" y="3163824"/>
+            <a:ext cx="0" cy="283463"/>
+          </a:xfrm>
+          <a:prstGeom prst="line">
+            <a:avLst/>
+          </a:prstGeom>
+          <a:ln w="19050">
+            <a:solidFill>
+              <a:srgbClr val="808080"/>
+            </a:solidFill>
+          </a:ln>
+        </p:spPr>
+        <p:style>
+          <a:lnRef idx="2">
+            <a:schemeClr val="accent1"/>
+          </a:lnRef>
+          <a:fillRef idx="0">
+            <a:schemeClr val="accent1"/>
+          </a:fillRef>
+          <a:effectRef idx="1">
+            <a:schemeClr val="accent1"/>
+          </a:effectRef>
+          <a:fontRef idx="minor">
+            <a:schemeClr val="tx1"/>
+          </a:fontRef>
+        </p:style>
+      </p:cxnSp>
+      <p:sp>
+        <p:nvSpPr>
+          <p:cNvPr id="8" name="Rounded Rectangle 7"/>
+          <p:cNvSpPr/>
+          <p:nvPr/>
+        </p:nvSpPr>
+        <p:spPr>
+          <a:xfrm>
+            <a:off x="6035040" y="2546604"/>
+            <a:ext cx="5486400" cy="502920"/>
+          </a:xfrm>
+          <a:prstGeom prst="roundRect">
+            <a:avLst/>
+          </a:prstGeom>
+          <a:solidFill>
+            <a:srgbClr val="4472C4"/>
+          </a:solidFill>
+          <a:ln>
+            <a:solidFill>
+              <a:srgbClr val="FFFFFF"/>
+            </a:solidFill>
+          </a:ln>
+        </p:spPr>
+        <p:style>
+          <a:lnRef idx="1">
+            <a:schemeClr val="accent1"/>
+          </a:lnRef>
+          <a:fillRef idx="3">
+            <a:schemeClr val="accent1"/>
+          </a:fillRef>
+          <a:effectRef idx="2">
+            <a:schemeClr val="accent1"/>
+          </a:effectRef>
+          <a:fontRef idx="minor">
+            <a:schemeClr val="lt1"/>
+          </a:fontRef>
+        </p:style>
+        <p:txBody>
+          <a:bodyPr rtlCol="0" anchor="ctr" wrap="square"/>
+          <a:lstStyle/>
+          <a:p>
+            <a:pPr algn="l">
+              <a:defRPr sz="900" b="1">
+                <a:solidFill>
+                  <a:srgbClr val="FFFFFF"/>
+                </a:solidFill>
+              </a:defRPr>
+            </a:pPr>
+            <a:r>
+              <a:t>IT bucket → Incident or Service Desk (resolve per SLA)</a:t>
+            </a:r>
+          </a:p>
+        </p:txBody>
+      </p:sp>
+      <p:cxnSp>
+        <p:nvCxnSpPr>
+          <p:cNvPr id="9" name="Connector 8"/>
+          <p:cNvCxnSpPr/>
+          <p:nvPr/>
+        </p:nvCxnSpPr>
+        <p:spPr>
+          <a:xfrm>
+            <a:off x="5120640" y="2798064"/>
+            <a:ext cx="914400" cy="0"/>
+          </a:xfrm>
+          <a:prstGeom prst="line">
+            <a:avLst/>
+          </a:prstGeom>
+          <a:ln w="19050">
+            <a:solidFill>
+              <a:srgbClr val="808080"/>
+            </a:solidFill>
+          </a:ln>
+        </p:spPr>
+        <p:style>
+          <a:lnRef idx="2">
+            <a:schemeClr val="accent1"/>
+          </a:lnRef>
+          <a:fillRef idx="0">
+            <a:schemeClr val="accent1"/>
+          </a:fillRef>
+          <a:effectRef idx="1">
+            <a:schemeClr val="accent1"/>
+          </a:effectRef>
+          <a:fontRef idx="minor">
+            <a:schemeClr val="tx1"/>
+          </a:fontRef>
+        </p:style>
+      </p:cxnSp>
+      <p:sp>
+        <p:nvSpPr>
+          <p:cNvPr id="10" name="TextBox 9"/>
+          <p:cNvSpPr txBox="1"/>
+          <p:nvPr/>
+        </p:nvSpPr>
+        <p:spPr>
+          <a:xfrm>
+            <a:off x="5166359" y="2505456"/>
+            <a:ext cx="914400" cy="274320"/>
+          </a:xfrm>
+          <a:prstGeom prst="rect">
+            <a:avLst/>
+          </a:prstGeom>
+          <a:noFill/>
+        </p:spPr>
+        <p:txBody>
+          <a:bodyPr wrap="none">
+            <a:spAutoFit/>
+          </a:bodyPr>
+          <a:lstStyle/>
+          <a:p>
+            <a:pPr algn="l">
+              <a:defRPr sz="900" b="1">
+                <a:solidFill>
+                  <a:srgbClr val="007000"/>
+                </a:solidFill>
+              </a:defRPr>
+            </a:pPr>
+            <a:r>
+              <a:t>Yes</a:t>
+            </a:r>
+          </a:p>
+        </p:txBody>
+      </p:sp>
+      <p:sp>
+        <p:nvSpPr>
+          <p:cNvPr id="11" name="Diamond 10"/>
+          <p:cNvSpPr/>
+          <p:nvPr/>
+        </p:nvSpPr>
+        <p:spPr>
+          <a:xfrm>
+            <a:off x="914400" y="3447287"/>
+            <a:ext cx="4206240" cy="731520"/>
+          </a:xfrm>
+          <a:prstGeom prst="diamond">
+            <a:avLst/>
+          </a:prstGeom>
+          <a:solidFill>
+            <a:srgbClr val="ED7D31"/>
+          </a:solidFill>
+          <a:ln>
+            <a:solidFill>
+              <a:srgbClr val="FFFFFF"/>
+            </a:solidFill>
+          </a:ln>
+        </p:spPr>
+        <p:style>
+          <a:lnRef idx="1">
+            <a:schemeClr val="accent1"/>
+          </a:lnRef>
+          <a:fillRef idx="3">
+            <a:schemeClr val="accent1"/>
+          </a:fillRef>
+          <a:effectRef idx="2">
+            <a:schemeClr val="accent1"/>
+          </a:effectRef>
+          <a:fontRef idx="minor">
+            <a:schemeClr val="lt1"/>
+          </a:fontRef>
+        </p:style>
+        <p:txBody>
+          <a:bodyPr rtlCol="0" anchor="ctr" wrap="square"/>
+          <a:lstStyle/>
+          <a:p>
+            <a:pPr algn="l">
+              <a:defRPr sz="1000" b="1">
+                <a:solidFill>
+                  <a:srgbClr val="FFFFFF"/>
+                </a:solidFill>
+              </a:defRPr>
+            </a:pPr>
+            <a:r>
+              <a:t>Change rule / case / allocation / import?</a:t>
+            </a:r>
+          </a:p>
+        </p:txBody>
+      </p:sp>
+      <p:cxnSp>
+        <p:nvCxnSpPr>
+          <p:cNvPr id="12" name="Connector 11"/>
+          <p:cNvCxnSpPr/>
+          <p:nvPr/>
+        </p:nvCxnSpPr>
+        <p:spPr>
+          <a:xfrm>
+            <a:off x="3017520" y="4178807"/>
+            <a:ext cx="0" cy="283465"/>
+          </a:xfrm>
+          <a:prstGeom prst="line">
+            <a:avLst/>
+          </a:prstGeom>
+          <a:ln w="19050">
+            <a:solidFill>
+              <a:srgbClr val="808080"/>
+            </a:solidFill>
+          </a:ln>
+        </p:spPr>
+        <p:style>
+          <a:lnRef idx="2">
+            <a:schemeClr val="accent1"/>
+          </a:lnRef>
+          <a:fillRef idx="0">
+            <a:schemeClr val="accent1"/>
+          </a:fillRef>
+          <a:effectRef idx="1">
+            <a:schemeClr val="accent1"/>
+          </a:effectRef>
+          <a:fontRef idx="minor">
+            <a:schemeClr val="tx1"/>
+          </a:fontRef>
+        </p:style>
+      </p:cxnSp>
+      <p:sp>
+        <p:nvSpPr>
+          <p:cNvPr id="13" name="Rounded Rectangle 12"/>
+          <p:cNvSpPr/>
+          <p:nvPr/>
+        </p:nvSpPr>
+        <p:spPr>
+          <a:xfrm>
+            <a:off x="6035040" y="3561587"/>
+            <a:ext cx="5486400" cy="502920"/>
+          </a:xfrm>
+          <a:prstGeom prst="roundRect">
+            <a:avLst/>
+          </a:prstGeom>
+          <a:solidFill>
+            <a:srgbClr val="4472C4"/>
+          </a:solidFill>
+          <a:ln>
+            <a:solidFill>
+              <a:srgbClr val="FFFFFF"/>
+            </a:solidFill>
+          </a:ln>
+        </p:spPr>
+        <p:style>
+          <a:lnRef idx="1">
+            <a:schemeClr val="accent1"/>
+          </a:lnRef>
+          <a:fillRef idx="3">
+            <a:schemeClr val="accent1"/>
+          </a:fillRef>
+          <a:effectRef idx="2">
+            <a:schemeClr val="accent1"/>
+          </a:effectRef>
+          <a:fontRef idx="minor">
+            <a:schemeClr val="lt1"/>
+          </a:fontRef>
+        </p:style>
+        <p:txBody>
+          <a:bodyPr rtlCol="0" anchor="ctr" wrap="square"/>
+          <a:lstStyle/>
+          <a:p>
+            <a:pPr algn="l">
+              <a:defRPr sz="900" b="1">
+                <a:solidFill>
+                  <a:srgbClr val="FFFFFF"/>
+                </a:solidFill>
+              </a:defRPr>
+            </a:pPr>
+            <a:r>
+              <a:t>Business bucket → redirect to BRD / self-service</a:t>
+            </a:r>
+          </a:p>
+        </p:txBody>
+      </p:sp>
+      <p:cxnSp>
+        <p:nvCxnSpPr>
+          <p:cNvPr id="14" name="Connector 13"/>
+          <p:cNvCxnSpPr/>
+          <p:nvPr/>
+        </p:nvCxnSpPr>
+        <p:spPr>
+          <a:xfrm>
+            <a:off x="5120640" y="3813048"/>
+            <a:ext cx="914400" cy="0"/>
+          </a:xfrm>
+          <a:prstGeom prst="line">
+            <a:avLst/>
+          </a:prstGeom>
+          <a:ln w="19050">
+            <a:solidFill>
+              <a:srgbClr val="808080"/>
+            </a:solidFill>
+          </a:ln>
+        </p:spPr>
+        <p:style>
+          <a:lnRef idx="2">
+            <a:schemeClr val="accent1"/>
+          </a:lnRef>
+          <a:fillRef idx="0">
+            <a:schemeClr val="accent1"/>
+          </a:fillRef>
+          <a:effectRef idx="1">
+            <a:schemeClr val="accent1"/>
+          </a:effectRef>
+          <a:fontRef idx="minor">
+            <a:schemeClr val="tx1"/>
+          </a:fontRef>
+        </p:style>
+      </p:cxnSp>
+      <p:sp>
+        <p:nvSpPr>
+          <p:cNvPr id="15" name="TextBox 14"/>
+          <p:cNvSpPr txBox="1"/>
+          <p:nvPr/>
+        </p:nvSpPr>
+        <p:spPr>
+          <a:xfrm>
+            <a:off x="5166359" y="3520440"/>
+            <a:ext cx="914400" cy="274320"/>
+          </a:xfrm>
+          <a:prstGeom prst="rect">
+            <a:avLst/>
+          </a:prstGeom>
+          <a:noFill/>
+        </p:spPr>
+        <p:txBody>
+          <a:bodyPr wrap="none">
+            <a:spAutoFit/>
+          </a:bodyPr>
+          <a:lstStyle/>
+          <a:p>
+            <a:pPr algn="l">
+              <a:defRPr sz="900" b="1">
+                <a:solidFill>
+                  <a:srgbClr val="007000"/>
+                </a:solidFill>
+              </a:defRPr>
+            </a:pPr>
+            <a:r>
+              <a:t>Yes</a:t>
+            </a:r>
+          </a:p>
+        </p:txBody>
+      </p:sp>
+      <p:sp>
+        <p:nvSpPr>
+          <p:cNvPr id="16" name="Diamond 15"/>
+          <p:cNvSpPr/>
+          <p:nvPr/>
+        </p:nvSpPr>
+        <p:spPr>
+          <a:xfrm>
+            <a:off x="914400" y="4462272"/>
+            <a:ext cx="4206240" cy="731520"/>
+          </a:xfrm>
+          <a:prstGeom prst="diamond">
+            <a:avLst/>
+          </a:prstGeom>
+          <a:solidFill>
+            <a:srgbClr val="ED7D31"/>
+          </a:solidFill>
+          <a:ln>
+            <a:solidFill>
+              <a:srgbClr val="FFFFFF"/>
+            </a:solidFill>
+          </a:ln>
+        </p:spPr>
+        <p:style>
+          <a:lnRef idx="1">
+            <a:schemeClr val="accent1"/>
+          </a:lnRef>
+          <a:fillRef idx="3">
+            <a:schemeClr val="accent1"/>
+          </a:fillRef>
+          <a:effectRef idx="2">
+            <a:schemeClr val="accent1"/>
+          </a:effectRef>
+          <a:fontRef idx="minor">
+            <a:schemeClr val="lt1"/>
+          </a:fontRef>
+        </p:style>
+        <p:txBody>
+          <a:bodyPr rtlCol="0" anchor="ctr" wrap="square"/>
+          <a:lstStyle/>
+          <a:p>
+            <a:pPr algn="l">
+              <a:defRPr sz="1000" b="1">
+                <a:solidFill>
+                  <a:srgbClr val="FFFFFF"/>
+                </a:solidFill>
+              </a:defRPr>
+            </a:pPr>
+            <a:r>
+              <a:t>Build / enhance / new feature?</a:t>
+            </a:r>
+          </a:p>
+        </p:txBody>
+      </p:sp>
+      <p:cxnSp>
+        <p:nvCxnSpPr>
+          <p:cNvPr id="17" name="Connector 16"/>
+          <p:cNvCxnSpPr/>
+          <p:nvPr/>
+        </p:nvCxnSpPr>
+        <p:spPr>
+          <a:xfrm>
+            <a:off x="3017520" y="5193792"/>
+            <a:ext cx="0" cy="283463"/>
+          </a:xfrm>
+          <a:prstGeom prst="line">
+            <a:avLst/>
+          </a:prstGeom>
+          <a:ln w="19050">
+            <a:solidFill>
+              <a:srgbClr val="808080"/>
+            </a:solidFill>
+          </a:ln>
+        </p:spPr>
+        <p:style>
+          <a:lnRef idx="2">
+            <a:schemeClr val="accent1"/>
+          </a:lnRef>
+          <a:fillRef idx="0">
+            <a:schemeClr val="accent1"/>
+          </a:fillRef>
+          <a:effectRef idx="1">
+            <a:schemeClr val="accent1"/>
+          </a:effectRef>
+          <a:fontRef idx="minor">
+            <a:schemeClr val="tx1"/>
+          </a:fontRef>
+        </p:style>
+      </p:cxnSp>
+      <p:sp>
+        <p:nvSpPr>
+          <p:cNvPr id="18" name="Rounded Rectangle 17"/>
+          <p:cNvSpPr/>
+          <p:nvPr/>
+        </p:nvSpPr>
+        <p:spPr>
+          <a:xfrm>
+            <a:off x="6035040" y="4576572"/>
+            <a:ext cx="5486400" cy="502920"/>
+          </a:xfrm>
+          <a:prstGeom prst="roundRect">
+            <a:avLst/>
+          </a:prstGeom>
+          <a:solidFill>
+            <a:srgbClr val="4472C4"/>
+          </a:solidFill>
+          <a:ln>
+            <a:solidFill>
+              <a:srgbClr val="FFFFFF"/>
+            </a:solidFill>
+          </a:ln>
+        </p:spPr>
+        <p:style>
+          <a:lnRef idx="1">
+            <a:schemeClr val="accent1"/>
+          </a:lnRef>
+          <a:fillRef idx="3">
+            <a:schemeClr val="accent1"/>
+          </a:fillRef>
+          <a:effectRef idx="2">
+            <a:schemeClr val="accent1"/>
+          </a:effectRef>
+          <a:fontRef idx="minor">
+            <a:schemeClr val="lt1"/>
+          </a:fontRef>
+        </p:style>
+        <p:txBody>
+          <a:bodyPr rtlCol="0" anchor="ctr" wrap="square"/>
+          <a:lstStyle/>
+          <a:p>
+            <a:pPr algn="l">
+              <a:defRPr sz="900" b="1">
+                <a:solidFill>
+                  <a:srgbClr val="FFFFFF"/>
+                </a:solidFill>
+              </a:defRPr>
+            </a:pPr>
+            <a:r>
+              <a:t>BRD accepted ≥80%? No → redirect; Yes → IT triage</a:t>
+            </a:r>
+          </a:p>
+        </p:txBody>
+      </p:sp>
+      <p:cxnSp>
+        <p:nvCxnSpPr>
+          <p:cNvPr id="19" name="Connector 18"/>
+          <p:cNvCxnSpPr/>
+          <p:nvPr/>
+        </p:nvCxnSpPr>
+        <p:spPr>
+          <a:xfrm>
+            <a:off x="5120640" y="4828032"/>
+            <a:ext cx="914400" cy="0"/>
+          </a:xfrm>
+          <a:prstGeom prst="line">
+            <a:avLst/>
+          </a:prstGeom>
+          <a:ln w="19050">
+            <a:solidFill>
+              <a:srgbClr val="808080"/>
+            </a:solidFill>
+          </a:ln>
+        </p:spPr>
+        <p:style>
+          <a:lnRef idx="2">
+            <a:schemeClr val="accent1"/>
+          </a:lnRef>
+          <a:fillRef idx="0">
+            <a:schemeClr val="accent1"/>
+          </a:fillRef>
+          <a:effectRef idx="1">
+            <a:schemeClr val="accent1"/>
+          </a:effectRef>
+          <a:fontRef idx="minor">
+            <a:schemeClr val="tx1"/>
+          </a:fontRef>
+        </p:style>
+      </p:cxnSp>
+      <p:sp>
+        <p:nvSpPr>
+          <p:cNvPr id="20" name="TextBox 19"/>
+          <p:cNvSpPr txBox="1"/>
+          <p:nvPr/>
+        </p:nvSpPr>
+        <p:spPr>
+          <a:xfrm>
+            <a:off x="5166359" y="4535424"/>
+            <a:ext cx="914400" cy="274320"/>
+          </a:xfrm>
+          <a:prstGeom prst="rect">
+            <a:avLst/>
+          </a:prstGeom>
+          <a:noFill/>
+        </p:spPr>
+        <p:txBody>
+          <a:bodyPr wrap="none">
+            <a:spAutoFit/>
+          </a:bodyPr>
+          <a:lstStyle/>
+          <a:p>
+            <a:pPr algn="l">
+              <a:defRPr sz="900" b="1">
+                <a:solidFill>
+                  <a:srgbClr val="007000"/>
+                </a:solidFill>
+              </a:defRPr>
+            </a:pPr>
+            <a:r>
+              <a:t>Yes</a:t>
+            </a:r>
+          </a:p>
+        </p:txBody>
+      </p:sp>
+      <p:sp>
+        <p:nvSpPr>
+          <p:cNvPr id="21" name="Rounded Rectangle 20"/>
+          <p:cNvSpPr/>
+          <p:nvPr/>
+        </p:nvSpPr>
+        <p:spPr>
+          <a:xfrm>
+            <a:off x="914400" y="5477255"/>
+            <a:ext cx="4206240" cy="731520"/>
+          </a:xfrm>
+          <a:prstGeom prst="roundRect">
+            <a:avLst/>
+          </a:prstGeom>
+          <a:solidFill>
+            <a:srgbClr val="C00000"/>
+          </a:solidFill>
+          <a:ln>
+            <a:solidFill>
+              <a:srgbClr val="FFFFFF"/>
+            </a:solidFill>
+          </a:ln>
+        </p:spPr>
+        <p:style>
+          <a:lnRef idx="1">
+            <a:schemeClr val="accent1"/>
+          </a:lnRef>
+          <a:fillRef idx="3">
+            <a:schemeClr val="accent1"/>
+          </a:fillRef>
+          <a:effectRef idx="2">
+            <a:schemeClr val="accent1"/>
+          </a:effectRef>
+          <a:fontRef idx="minor">
+            <a:schemeClr val="lt1"/>
+          </a:fontRef>
+        </p:style>
+        <p:txBody>
+          <a:bodyPr rtlCol="0" anchor="ctr" wrap="square"/>
+          <a:lstStyle/>
+          <a:p>
+            <a:pPr algn="l">
+              <a:defRPr sz="1000" b="1">
+                <a:solidFill>
+                  <a:srgbClr val="FFFFFF"/>
+                </a:solidFill>
+              </a:defRPr>
+            </a:pPr>
+            <a:r>
+              <a:t>Unsure → BA 30-min triage (no Dev assign)</a:t>
             </a:r>
           </a:p>
         </p:txBody>
@@ -4969,7 +5728,7 @@
           <a:lstStyle/>
           <a:p>
             <a:r>
-              <a:t>Support Ticket Runbook</a:t>
+              <a:t>30-Second Triage Card</a:t>
             </a:r>
           </a:p>
         </p:txBody>
@@ -4990,43 +5749,46 @@
           <a:lstStyle/>
           <a:p>
             <a:r>
-              <a:t>IT catalog SR only — NOT feature delivery or case work:</a:t>
+              <a:t>Ask in order — stop when answered:</a:t>
             </a:r>
           </a:p>
           <a:p/>
           <a:p>
             <a:r>
-              <a:t>1. ACKNOWLEDGE (≤ 15 min P3) — ITSM ticket from catalog</a:t>
-            </a:r>
-          </a:p>
-          <a:p>
-            <a:r>
-              <a:t>2. CLASSIFY — IT catalog / Business self-service / Incident (≤ 30 min)</a:t>
-            </a:r>
-          </a:p>
-          <a:p>
-            <a:r>
-              <a:t>3. If business-owned (case, rule, feature) → redirect &amp; close IT queue</a:t>
-            </a:r>
-          </a:p>
-          <a:p>
-            <a:r>
-              <a:t>4. If IT catalog → assign group + priority (≤ 1 hr)</a:t>
-            </a:r>
-          </a:p>
-          <a:p>
-            <a:r>
-              <a:t>5. RESOLVE per SLA — systems &amp; access only</a:t>
-            </a:r>
-          </a:p>
-          <a:p>
-            <a:r>
-              <a:t>6. CLOSE — user confirms; KB article if repeat</a:t>
-            </a:r>
-          </a:p>
-          <a:p>
-            <a:r>
-              <a:t>7. EOD — wrong-bucket count; weekend triggers logged</a:t>
+              <a:t>1. Is the SYSTEM broken, slow, or access blocked?</a:t>
+            </a:r>
+          </a:p>
+          <a:p>
+            <a:r>
+              <a:t>   YES → IT ticket (Incident or Service Desk)</a:t>
+            </a:r>
+          </a:p>
+          <a:p/>
+          <a:p>
+            <a:r>
+              <a:t>2. Is it CHANGE RULE / CASE / IMPORT / REPORT DEFINITION?</a:t>
+            </a:r>
+          </a:p>
+          <a:p>
+            <a:r>
+              <a:t>   YES → Business bucket → redirect to BRD</a:t>
+            </a:r>
+          </a:p>
+          <a:p/>
+          <a:p>
+            <a:r>
+              <a:t>3. Is it BUILD / ENHANCE / INTEGRATE?</a:t>
+            </a:r>
+          </a:p>
+          <a:p>
+            <a:r>
+              <a:t>   YES → Accepted BRD linked? NO → redirect to BRD first</a:t>
+            </a:r>
+          </a:p>
+          <a:p/>
+          <a:p>
+            <a:r>
+              <a:t>4. Still unsure? → BA 30-min triage call — DO NOT assign to Dev</a:t>
             </a:r>
           </a:p>
         </p:txBody>
@@ -5065,7 +5827,7 @@
           <a:lstStyle/>
           <a:p>
             <a:r>
-              <a:t>Redirect Template — Delegate to Business</a:t>
+              <a:t>Support Ticket Runbook</a:t>
             </a:r>
           </a:p>
         </p:txBody>
@@ -5086,51 +5848,43 @@
           <a:lstStyle/>
           <a:p>
             <a:r>
-              <a:t>Send when request is NOT in IT catalog (case, rule, feature):</a:t>
+              <a:t>IT catalog SR only — NOT feature delivery or case work:</a:t>
             </a:r>
           </a:p>
           <a:p/>
           <a:p>
             <a:r>
-              <a:t>"This request is business-owned — IT does not update cases,</a:t>
-            </a:r>
-          </a:p>
-          <a:p>
-            <a:r>
-              <a:t>  allocation, or rules via Service Desk.</a:t>
-            </a:r>
-          </a:p>
-          <a:p/>
-          <a:p>
-            <a:r>
-              <a:t> IT catalog is for: access, system errors, approved imports.</a:t>
-            </a:r>
-          </a:p>
-          <a:p/>
-          <a:p>
-            <a:r>
-              <a:t> Your team must handle:</a:t>
-            </a:r>
-          </a:p>
-          <a:p>
-            <a:r>
-              <a:t>  • Case / allocation updates → business ops process</a:t>
-            </a:r>
-          </a:p>
-          <a:p>
-            <a:r>
-              <a:t>  • Rule or feature changes → BRD intake + Sponsor sign-off</a:t>
-            </a:r>
-          </a:p>
-          <a:p>
-            <a:r>
-              <a:t>  • Outcome disputes (loan rejected, etc.) → Credit / business ops</a:t>
-            </a:r>
-          </a:p>
-          <a:p/>
-          <a:p>
-            <a:r>
-              <a:t> IT can provide audit logs only. Please use your business channel."</a:t>
+              <a:t>1. ACKNOWLEDGE (≤ 15 min P3) — ITSM ticket from catalog</a:t>
+            </a:r>
+          </a:p>
+          <a:p>
+            <a:r>
+              <a:t>2. CLASSIFY — IT catalog / Business self-service / Incident (≤ 30 min)</a:t>
+            </a:r>
+          </a:p>
+          <a:p>
+            <a:r>
+              <a:t>3. If business-owned (case, rule, feature) → redirect &amp; close IT queue</a:t>
+            </a:r>
+          </a:p>
+          <a:p>
+            <a:r>
+              <a:t>4. If IT catalog → assign group + priority (≤ 1 hr)</a:t>
+            </a:r>
+          </a:p>
+          <a:p>
+            <a:r>
+              <a:t>5. RESOLVE per SLA — systems &amp; access only</a:t>
+            </a:r>
+          </a:p>
+          <a:p>
+            <a:r>
+              <a:t>6. CLOSE — user confirms; KB article if repeat</a:t>
+            </a:r>
+          </a:p>
+          <a:p>
+            <a:r>
+              <a:t>7. EOD — wrong-bucket count; weekend triggers logged</a:t>
             </a:r>
           </a:p>
         </p:txBody>
@@ -5169,7 +5923,7 @@
           <a:lstStyle/>
           <a:p>
             <a:r>
-              <a:t>Incident vs SR vs Business Work</a:t>
+              <a:t>Redirect Template — Delegate to Business</a:t>
             </a:r>
           </a:p>
         </p:txBody>
@@ -5190,38 +5944,51 @@
           <a:lstStyle/>
           <a:p>
             <a:r>
-              <a:t>INCIDENT (IT): FE ONLINE down; POS cannot submit; batch stuck</a:t>
-            </a:r>
-          </a:p>
-          <a:p>
-            <a:r>
-              <a:t>SERVICE REQUEST (IT): Password reset; new user access</a:t>
-            </a:r>
-          </a:p>
-          <a:p>
-            <a:r>
-              <a:t>BUSINESS WORK (not IT): Fix wrong disbursement; update case status</a:t>
-            </a:r>
-          </a:p>
-          <a:p>
-            <a:r>
-              <a:t>DEFECT (IT after release): Bug in new feature → link to release</a:t>
+              <a:t>Send when request is NOT in IT catalog (case, rule, feature):</a:t>
             </a:r>
           </a:p>
           <a:p/>
           <a:p>
             <a:r>
-              <a:t>User says "incident" but means business activity?</a:t>
-            </a:r>
-          </a:p>
-          <a:p>
-            <a:r>
-              <a:t>  "Update 200 cases to closed" → Business import process</a:t>
-            </a:r>
-          </a:p>
-          <a:p>
-            <a:r>
-              <a:t>  "Customer angry — fix their loan" → Business ops; IT = audit log only</a:t>
+              <a:t>"This request is business-owned — IT does not update cases,</a:t>
+            </a:r>
+          </a:p>
+          <a:p>
+            <a:r>
+              <a:t>  allocation, or rules via Service Desk.</a:t>
+            </a:r>
+          </a:p>
+          <a:p/>
+          <a:p>
+            <a:r>
+              <a:t> IT catalog is for: access, system errors, approved imports.</a:t>
+            </a:r>
+          </a:p>
+          <a:p/>
+          <a:p>
+            <a:r>
+              <a:t> Your team must handle:</a:t>
+            </a:r>
+          </a:p>
+          <a:p>
+            <a:r>
+              <a:t>  • Case / allocation updates → business ops process</a:t>
+            </a:r>
+          </a:p>
+          <a:p>
+            <a:r>
+              <a:t>  • Rule or feature changes → BRD intake + Sponsor sign-off</a:t>
+            </a:r>
+          </a:p>
+          <a:p>
+            <a:r>
+              <a:t>  • Outcome disputes (loan rejected, etc.) → Credit / business ops</a:t>
+            </a:r>
+          </a:p>
+          <a:p/>
+          <a:p>
+            <a:r>
+              <a:t> IT can provide audit logs only. Please use your business channel."</a:t>
             </a:r>
           </a:p>
         </p:txBody>
@@ -5340,509 +6107,59 @@
           <a:lstStyle/>
           <a:p>
             <a:r>
-              <a:t>Incident Response Flow</a:t>
-            </a:r>
-          </a:p>
-        </p:txBody>
-      </p:sp>
-      <p:sp>
-        <p:nvSpPr>
-          <p:cNvPr id="3" name="TextBox 2"/>
-          <p:cNvSpPr txBox="1"/>
-          <p:nvPr/>
-        </p:nvSpPr>
-        <p:spPr>
-          <a:xfrm>
-            <a:off x="457200" y="1051560"/>
-            <a:ext cx="11247120" cy="365760"/>
-          </a:xfrm>
-          <a:prstGeom prst="rect">
-            <a:avLst/>
-          </a:prstGeom>
-          <a:noFill/>
-        </p:spPr>
-        <p:txBody>
-          <a:bodyPr wrap="none">
-            <a:spAutoFit/>
-          </a:bodyPr>
-          <a:lstStyle/>
-          <a:p>
-            <a:pPr>
-              <a:defRPr sz="1400">
-                <a:solidFill>
-                  <a:srgbClr val="555555"/>
-                </a:solidFill>
-              </a:defRPr>
-            </a:pPr>
-            <a:r>
-              <a:t>Restore service first — business data correction follows approved process</a:t>
-            </a:r>
-          </a:p>
-        </p:txBody>
-      </p:sp>
-      <p:sp>
-        <p:nvSpPr>
-          <p:cNvPr id="4" name="Rounded Rectangle 3"/>
-          <p:cNvSpPr/>
-          <p:nvPr/>
-        </p:nvSpPr>
-        <p:spPr>
-          <a:xfrm>
-            <a:off x="2003907" y="2743200"/>
-            <a:ext cx="1417320" cy="868680"/>
-          </a:xfrm>
-          <a:prstGeom prst="roundRect">
-            <a:avLst/>
-          </a:prstGeom>
-          <a:solidFill>
-            <a:srgbClr val="1F4E79"/>
-          </a:solidFill>
-          <a:ln>
-            <a:solidFill>
-              <a:srgbClr val="FFFFFF"/>
-            </a:solidFill>
-          </a:ln>
-        </p:spPr>
-        <p:style>
-          <a:lnRef idx="1">
-            <a:schemeClr val="accent1"/>
-          </a:lnRef>
-          <a:fillRef idx="3">
-            <a:schemeClr val="accent1"/>
-          </a:fillRef>
-          <a:effectRef idx="2">
-            <a:schemeClr val="accent1"/>
-          </a:effectRef>
-          <a:fontRef idx="minor">
-            <a:schemeClr val="lt1"/>
-          </a:fontRef>
-        </p:style>
-        <p:txBody>
-          <a:bodyPr rtlCol="0" anchor="ctr" wrap="square"/>
-          <a:lstStyle/>
-          <a:p>
-            <a:pPr algn="l">
-              <a:defRPr sz="1100" b="1">
-                <a:solidFill>
-                  <a:srgbClr val="FFFFFF"/>
-                </a:solidFill>
-              </a:defRPr>
-            </a:pPr>
-            <a:r>
-              <a:t>Detect</a:t>
-            </a:r>
-          </a:p>
-          <a:p>
-            <a:r>
-              <a:t>&amp; log</a:t>
-            </a:r>
-          </a:p>
-        </p:txBody>
-      </p:sp>
-      <p:sp>
-        <p:nvSpPr>
-          <p:cNvPr id="5" name="Right Arrow 4"/>
-          <p:cNvSpPr/>
-          <p:nvPr/>
-        </p:nvSpPr>
-        <p:spPr>
-          <a:xfrm>
-            <a:off x="3421227" y="2971800"/>
-            <a:ext cx="274320" cy="320040"/>
-          </a:xfrm>
-          <a:prstGeom prst="rightArrow">
-            <a:avLst/>
-          </a:prstGeom>
-          <a:solidFill>
-            <a:srgbClr val="BFBFBF"/>
-          </a:solidFill>
-          <a:ln>
-            <a:noFill/>
-          </a:ln>
-        </p:spPr>
-        <p:style>
-          <a:lnRef idx="1">
-            <a:schemeClr val="accent1"/>
-          </a:lnRef>
-          <a:fillRef idx="3">
-            <a:schemeClr val="accent1"/>
-          </a:fillRef>
-          <a:effectRef idx="2">
-            <a:schemeClr val="accent1"/>
-          </a:effectRef>
-          <a:fontRef idx="minor">
-            <a:schemeClr val="lt1"/>
-          </a:fontRef>
-        </p:style>
-        <p:txBody>
-          <a:bodyPr rtlCol="0" anchor="ctr"/>
-          <a:lstStyle/>
-          <a:p>
-            <a:pPr algn="ctr"/>
-          </a:p>
-        </p:txBody>
-      </p:sp>
-      <p:sp>
-        <p:nvSpPr>
-          <p:cNvPr id="6" name="Rounded Rectangle 5"/>
-          <p:cNvSpPr/>
-          <p:nvPr/>
-        </p:nvSpPr>
-        <p:spPr>
-          <a:xfrm>
-            <a:off x="3695547" y="2743200"/>
-            <a:ext cx="1417320" cy="868680"/>
-          </a:xfrm>
-          <a:prstGeom prst="roundRect">
-            <a:avLst/>
-          </a:prstGeom>
-          <a:solidFill>
-            <a:srgbClr val="2E75B6"/>
-          </a:solidFill>
-          <a:ln>
-            <a:solidFill>
-              <a:srgbClr val="FFFFFF"/>
-            </a:solidFill>
-          </a:ln>
-        </p:spPr>
-        <p:style>
-          <a:lnRef idx="1">
-            <a:schemeClr val="accent1"/>
-          </a:lnRef>
-          <a:fillRef idx="3">
-            <a:schemeClr val="accent1"/>
-          </a:fillRef>
-          <a:effectRef idx="2">
-            <a:schemeClr val="accent1"/>
-          </a:effectRef>
-          <a:fontRef idx="minor">
-            <a:schemeClr val="lt1"/>
-          </a:fontRef>
-        </p:style>
-        <p:txBody>
-          <a:bodyPr rtlCol="0" anchor="ctr" wrap="square"/>
-          <a:lstStyle/>
-          <a:p>
-            <a:pPr algn="l">
-              <a:defRPr sz="1100" b="1">
-                <a:solidFill>
-                  <a:srgbClr val="FFFFFF"/>
-                </a:solidFill>
-              </a:defRPr>
-            </a:pPr>
-            <a:r>
-              <a:t>Triage</a:t>
-            </a:r>
-          </a:p>
-          <a:p>
-            <a:r>
-              <a:t>P1-P4</a:t>
-            </a:r>
-          </a:p>
-        </p:txBody>
-      </p:sp>
-      <p:sp>
-        <p:nvSpPr>
-          <p:cNvPr id="7" name="Right Arrow 6"/>
-          <p:cNvSpPr/>
-          <p:nvPr/>
-        </p:nvSpPr>
-        <p:spPr>
-          <a:xfrm>
-            <a:off x="5112867" y="2971800"/>
-            <a:ext cx="274320" cy="320040"/>
-          </a:xfrm>
-          <a:prstGeom prst="rightArrow">
-            <a:avLst/>
-          </a:prstGeom>
-          <a:solidFill>
-            <a:srgbClr val="BFBFBF"/>
-          </a:solidFill>
-          <a:ln>
-            <a:noFill/>
-          </a:ln>
-        </p:spPr>
-        <p:style>
-          <a:lnRef idx="1">
-            <a:schemeClr val="accent1"/>
-          </a:lnRef>
-          <a:fillRef idx="3">
-            <a:schemeClr val="accent1"/>
-          </a:fillRef>
-          <a:effectRef idx="2">
-            <a:schemeClr val="accent1"/>
-          </a:effectRef>
-          <a:fontRef idx="minor">
-            <a:schemeClr val="lt1"/>
-          </a:fontRef>
-        </p:style>
-        <p:txBody>
-          <a:bodyPr rtlCol="0" anchor="ctr"/>
-          <a:lstStyle/>
-          <a:p>
-            <a:pPr algn="ctr"/>
-          </a:p>
-        </p:txBody>
-      </p:sp>
-      <p:sp>
-        <p:nvSpPr>
-          <p:cNvPr id="8" name="Rounded Rectangle 7"/>
-          <p:cNvSpPr/>
-          <p:nvPr/>
-        </p:nvSpPr>
-        <p:spPr>
-          <a:xfrm>
-            <a:off x="5387187" y="2743200"/>
-            <a:ext cx="1417320" cy="868680"/>
-          </a:xfrm>
-          <a:prstGeom prst="roundRect">
-            <a:avLst/>
-          </a:prstGeom>
-          <a:solidFill>
-            <a:srgbClr val="5B9BD5"/>
-          </a:solidFill>
-          <a:ln>
-            <a:solidFill>
-              <a:srgbClr val="FFFFFF"/>
-            </a:solidFill>
-          </a:ln>
-        </p:spPr>
-        <p:style>
-          <a:lnRef idx="1">
-            <a:schemeClr val="accent1"/>
-          </a:lnRef>
-          <a:fillRef idx="3">
-            <a:schemeClr val="accent1"/>
-          </a:fillRef>
-          <a:effectRef idx="2">
-            <a:schemeClr val="accent1"/>
-          </a:effectRef>
-          <a:fontRef idx="minor">
-            <a:schemeClr val="lt1"/>
-          </a:fontRef>
-        </p:style>
-        <p:txBody>
-          <a:bodyPr rtlCol="0" anchor="ctr" wrap="square"/>
-          <a:lstStyle/>
-          <a:p>
-            <a:pPr algn="l">
-              <a:defRPr sz="1100" b="1">
-                <a:solidFill>
-                  <a:srgbClr val="FFFFFF"/>
-                </a:solidFill>
-              </a:defRPr>
-            </a:pPr>
-            <a:r>
-              <a:t>Diagnose</a:t>
-            </a:r>
-          </a:p>
-          <a:p>
-            <a:r>
-              <a:t>&amp; contain</a:t>
-            </a:r>
-          </a:p>
-        </p:txBody>
-      </p:sp>
-      <p:sp>
-        <p:nvSpPr>
-          <p:cNvPr id="9" name="Right Arrow 8"/>
-          <p:cNvSpPr/>
-          <p:nvPr/>
-        </p:nvSpPr>
-        <p:spPr>
-          <a:xfrm>
-            <a:off x="6804507" y="2971800"/>
-            <a:ext cx="274320" cy="320040"/>
-          </a:xfrm>
-          <a:prstGeom prst="rightArrow">
-            <a:avLst/>
-          </a:prstGeom>
-          <a:solidFill>
-            <a:srgbClr val="BFBFBF"/>
-          </a:solidFill>
-          <a:ln>
-            <a:noFill/>
-          </a:ln>
-        </p:spPr>
-        <p:style>
-          <a:lnRef idx="1">
-            <a:schemeClr val="accent1"/>
-          </a:lnRef>
-          <a:fillRef idx="3">
-            <a:schemeClr val="accent1"/>
-          </a:fillRef>
-          <a:effectRef idx="2">
-            <a:schemeClr val="accent1"/>
-          </a:effectRef>
-          <a:fontRef idx="minor">
-            <a:schemeClr val="lt1"/>
-          </a:fontRef>
-        </p:style>
-        <p:txBody>
-          <a:bodyPr rtlCol="0" anchor="ctr"/>
-          <a:lstStyle/>
-          <a:p>
-            <a:pPr algn="ctr"/>
-          </a:p>
-        </p:txBody>
-      </p:sp>
-      <p:sp>
-        <p:nvSpPr>
-          <p:cNvPr id="10" name="Rounded Rectangle 9"/>
-          <p:cNvSpPr/>
-          <p:nvPr/>
-        </p:nvSpPr>
-        <p:spPr>
-          <a:xfrm>
-            <a:off x="7078827" y="2743200"/>
-            <a:ext cx="1417320" cy="868680"/>
-          </a:xfrm>
-          <a:prstGeom prst="roundRect">
-            <a:avLst/>
-          </a:prstGeom>
-          <a:solidFill>
-            <a:srgbClr val="70AD47"/>
-          </a:solidFill>
-          <a:ln>
-            <a:solidFill>
-              <a:srgbClr val="FFFFFF"/>
-            </a:solidFill>
-          </a:ln>
-        </p:spPr>
-        <p:style>
-          <a:lnRef idx="1">
-            <a:schemeClr val="accent1"/>
-          </a:lnRef>
-          <a:fillRef idx="3">
-            <a:schemeClr val="accent1"/>
-          </a:fillRef>
-          <a:effectRef idx="2">
-            <a:schemeClr val="accent1"/>
-          </a:effectRef>
-          <a:fontRef idx="minor">
-            <a:schemeClr val="lt1"/>
-          </a:fontRef>
-        </p:style>
-        <p:txBody>
-          <a:bodyPr rtlCol="0" anchor="ctr" wrap="square"/>
-          <a:lstStyle/>
-          <a:p>
-            <a:pPr algn="l">
-              <a:defRPr sz="1100" b="1">
-                <a:solidFill>
-                  <a:srgbClr val="FFFFFF"/>
-                </a:solidFill>
-              </a:defRPr>
-            </a:pPr>
-            <a:r>
-              <a:t>Resolve</a:t>
-            </a:r>
-          </a:p>
-          <a:p>
-            <a:r>
-              <a:t>&amp; verify</a:t>
-            </a:r>
-          </a:p>
-        </p:txBody>
-      </p:sp>
-      <p:sp>
-        <p:nvSpPr>
-          <p:cNvPr id="11" name="Right Arrow 10"/>
-          <p:cNvSpPr/>
-          <p:nvPr/>
-        </p:nvSpPr>
-        <p:spPr>
-          <a:xfrm>
-            <a:off x="8496147" y="2971800"/>
-            <a:ext cx="274320" cy="320040"/>
-          </a:xfrm>
-          <a:prstGeom prst="rightArrow">
-            <a:avLst/>
-          </a:prstGeom>
-          <a:solidFill>
-            <a:srgbClr val="BFBFBF"/>
-          </a:solidFill>
-          <a:ln>
-            <a:noFill/>
-          </a:ln>
-        </p:spPr>
-        <p:style>
-          <a:lnRef idx="1">
-            <a:schemeClr val="accent1"/>
-          </a:lnRef>
-          <a:fillRef idx="3">
-            <a:schemeClr val="accent1"/>
-          </a:fillRef>
-          <a:effectRef idx="2">
-            <a:schemeClr val="accent1"/>
-          </a:effectRef>
-          <a:fontRef idx="minor">
-            <a:schemeClr val="lt1"/>
-          </a:fontRef>
-        </p:style>
-        <p:txBody>
-          <a:bodyPr rtlCol="0" anchor="ctr"/>
-          <a:lstStyle/>
-          <a:p>
-            <a:pPr algn="ctr"/>
-          </a:p>
-        </p:txBody>
-      </p:sp>
-      <p:sp>
-        <p:nvSpPr>
-          <p:cNvPr id="12" name="Rounded Rectangle 11"/>
-          <p:cNvSpPr/>
-          <p:nvPr/>
-        </p:nvSpPr>
-        <p:spPr>
-          <a:xfrm>
-            <a:off x="8770467" y="2743200"/>
-            <a:ext cx="1417320" cy="868680"/>
-          </a:xfrm>
-          <a:prstGeom prst="roundRect">
-            <a:avLst/>
-          </a:prstGeom>
-          <a:solidFill>
-            <a:srgbClr val="ED7D31"/>
-          </a:solidFill>
-          <a:ln>
-            <a:solidFill>
-              <a:srgbClr val="FFFFFF"/>
-            </a:solidFill>
-          </a:ln>
-        </p:spPr>
-        <p:style>
-          <a:lnRef idx="1">
-            <a:schemeClr val="accent1"/>
-          </a:lnRef>
-          <a:fillRef idx="3">
-            <a:schemeClr val="accent1"/>
-          </a:fillRef>
-          <a:effectRef idx="2">
-            <a:schemeClr val="accent1"/>
-          </a:effectRef>
-          <a:fontRef idx="minor">
-            <a:schemeClr val="lt1"/>
-          </a:fontRef>
-        </p:style>
-        <p:txBody>
-          <a:bodyPr rtlCol="0" anchor="ctr" wrap="square"/>
-          <a:lstStyle/>
-          <a:p>
-            <a:pPr algn="l">
-              <a:defRPr sz="1100" b="1">
-                <a:solidFill>
-                  <a:srgbClr val="FFFFFF"/>
-                </a:solidFill>
-              </a:defRPr>
-            </a:pPr>
-            <a:r>
-              <a:t>Post-</a:t>
-            </a:r>
-          </a:p>
-          <a:p>
-            <a:r>
-              <a:t>mortem</a:t>
+              <a:t>Incident vs SR vs Business Work</a:t>
+            </a:r>
+          </a:p>
+        </p:txBody>
+      </p:sp>
+      <p:sp>
+        <p:nvSpPr>
+          <p:cNvPr id="3" name="Content Placeholder 2"/>
+          <p:cNvSpPr>
+            <a:spLocks noGrp="1"/>
+          </p:cNvSpPr>
+          <p:nvPr>
+            <p:ph idx="1"/>
+          </p:nvPr>
+        </p:nvSpPr>
+        <p:spPr/>
+        <p:txBody>
+          <a:bodyPr/>
+          <a:lstStyle/>
+          <a:p>
+            <a:r>
+              <a:t>INCIDENT (IT): FE ONLINE down; POS cannot submit; batch stuck</a:t>
+            </a:r>
+          </a:p>
+          <a:p>
+            <a:r>
+              <a:t>SERVICE REQUEST (IT): Password reset; new user access</a:t>
+            </a:r>
+          </a:p>
+          <a:p>
+            <a:r>
+              <a:t>BUSINESS WORK (not IT): Fix wrong disbursement; update case status</a:t>
+            </a:r>
+          </a:p>
+          <a:p>
+            <a:r>
+              <a:t>DEFECT (IT after release): Bug in new feature → link to release</a:t>
+            </a:r>
+          </a:p>
+          <a:p/>
+          <a:p>
+            <a:r>
+              <a:t>User says "incident" but means business activity?</a:t>
+            </a:r>
+          </a:p>
+          <a:p>
+            <a:r>
+              <a:t>  "Update 200 cases to closed" → Business import process</a:t>
+            </a:r>
+          </a:p>
+          <a:p>
+            <a:r>
+              <a:t>  "Customer angry — fix their loan" → Business ops; IT = audit log only</a:t>
             </a:r>
           </a:p>
         </p:txBody>
@@ -5881,61 +6198,509 @@
           <a:lstStyle/>
           <a:p>
             <a:r>
-              <a:t>Incident Priority — P1 to P4</a:t>
-            </a:r>
-          </a:p>
-        </p:txBody>
-      </p:sp>
-      <p:sp>
-        <p:nvSpPr>
-          <p:cNvPr id="3" name="Content Placeholder 2"/>
-          <p:cNvSpPr>
-            <a:spLocks noGrp="1"/>
-          </p:cNvSpPr>
-          <p:nvPr>
-            <p:ph idx="1"/>
-          </p:nvPr>
-        </p:nvSpPr>
-        <p:spPr/>
-        <p:txBody>
-          <a:bodyPr/>
-          <a:lstStyle/>
-          <a:p>
-            <a:r>
-              <a:t>P1 CRITICAL — major business stop (core banking down, mass POS fail)</a:t>
-            </a:r>
-          </a:p>
-          <a:p>
-            <a:r>
-              <a:t>   Notify within 30 min: Ops, IT-Security, CIO, EXCO</a:t>
-            </a:r>
-          </a:p>
-          <a:p/>
-          <a:p>
-            <a:r>
-              <a:t>P2 MAJOR — significant degradation (login fail, collections batch stuck)</a:t>
-            </a:r>
-          </a:p>
-          <a:p>
-            <a:r>
-              <a:t>   Notify within 1 hr: Ops, IT Product, Sponsor</a:t>
-            </a:r>
-          </a:p>
-          <a:p/>
-          <a:p>
-            <a:r>
-              <a:t>P3 MODERATE — workaround exists (single region slow)</a:t>
-            </a:r>
-          </a:p>
-          <a:p>
-            <a:r>
-              <a:t>   Notify within 4 hr</a:t>
-            </a:r>
-          </a:p>
-          <a:p/>
-          <a:p>
-            <a:r>
-              <a:t>P4 MINOR — cosmetic / single user → next business day</a:t>
+              <a:t>Incident Response Flow</a:t>
+            </a:r>
+          </a:p>
+        </p:txBody>
+      </p:sp>
+      <p:sp>
+        <p:nvSpPr>
+          <p:cNvPr id="3" name="TextBox 2"/>
+          <p:cNvSpPr txBox="1"/>
+          <p:nvPr/>
+        </p:nvSpPr>
+        <p:spPr>
+          <a:xfrm>
+            <a:off x="457200" y="1051560"/>
+            <a:ext cx="11247120" cy="365760"/>
+          </a:xfrm>
+          <a:prstGeom prst="rect">
+            <a:avLst/>
+          </a:prstGeom>
+          <a:noFill/>
+        </p:spPr>
+        <p:txBody>
+          <a:bodyPr wrap="none">
+            <a:spAutoFit/>
+          </a:bodyPr>
+          <a:lstStyle/>
+          <a:p>
+            <a:pPr>
+              <a:defRPr sz="1400">
+                <a:solidFill>
+                  <a:srgbClr val="555555"/>
+                </a:solidFill>
+              </a:defRPr>
+            </a:pPr>
+            <a:r>
+              <a:t>Restore service first — business data correction follows approved process</a:t>
+            </a:r>
+          </a:p>
+        </p:txBody>
+      </p:sp>
+      <p:sp>
+        <p:nvSpPr>
+          <p:cNvPr id="4" name="Rounded Rectangle 3"/>
+          <p:cNvSpPr/>
+          <p:nvPr/>
+        </p:nvSpPr>
+        <p:spPr>
+          <a:xfrm>
+            <a:off x="2003907" y="2743200"/>
+            <a:ext cx="1417320" cy="868680"/>
+          </a:xfrm>
+          <a:prstGeom prst="roundRect">
+            <a:avLst/>
+          </a:prstGeom>
+          <a:solidFill>
+            <a:srgbClr val="1F4E79"/>
+          </a:solidFill>
+          <a:ln>
+            <a:solidFill>
+              <a:srgbClr val="FFFFFF"/>
+            </a:solidFill>
+          </a:ln>
+        </p:spPr>
+        <p:style>
+          <a:lnRef idx="1">
+            <a:schemeClr val="accent1"/>
+          </a:lnRef>
+          <a:fillRef idx="3">
+            <a:schemeClr val="accent1"/>
+          </a:fillRef>
+          <a:effectRef idx="2">
+            <a:schemeClr val="accent1"/>
+          </a:effectRef>
+          <a:fontRef idx="minor">
+            <a:schemeClr val="lt1"/>
+          </a:fontRef>
+        </p:style>
+        <p:txBody>
+          <a:bodyPr rtlCol="0" anchor="ctr" wrap="square"/>
+          <a:lstStyle/>
+          <a:p>
+            <a:pPr algn="l">
+              <a:defRPr sz="1100" b="1">
+                <a:solidFill>
+                  <a:srgbClr val="FFFFFF"/>
+                </a:solidFill>
+              </a:defRPr>
+            </a:pPr>
+            <a:r>
+              <a:t>Detect</a:t>
+            </a:r>
+          </a:p>
+          <a:p>
+            <a:r>
+              <a:t>&amp; log</a:t>
+            </a:r>
+          </a:p>
+        </p:txBody>
+      </p:sp>
+      <p:sp>
+        <p:nvSpPr>
+          <p:cNvPr id="5" name="Right Arrow 4"/>
+          <p:cNvSpPr/>
+          <p:nvPr/>
+        </p:nvSpPr>
+        <p:spPr>
+          <a:xfrm>
+            <a:off x="3421227" y="2971800"/>
+            <a:ext cx="274320" cy="320040"/>
+          </a:xfrm>
+          <a:prstGeom prst="rightArrow">
+            <a:avLst/>
+          </a:prstGeom>
+          <a:solidFill>
+            <a:srgbClr val="BFBFBF"/>
+          </a:solidFill>
+          <a:ln>
+            <a:noFill/>
+          </a:ln>
+        </p:spPr>
+        <p:style>
+          <a:lnRef idx="1">
+            <a:schemeClr val="accent1"/>
+          </a:lnRef>
+          <a:fillRef idx="3">
+            <a:schemeClr val="accent1"/>
+          </a:fillRef>
+          <a:effectRef idx="2">
+            <a:schemeClr val="accent1"/>
+          </a:effectRef>
+          <a:fontRef idx="minor">
+            <a:schemeClr val="lt1"/>
+          </a:fontRef>
+        </p:style>
+        <p:txBody>
+          <a:bodyPr rtlCol="0" anchor="ctr"/>
+          <a:lstStyle/>
+          <a:p>
+            <a:pPr algn="ctr"/>
+          </a:p>
+        </p:txBody>
+      </p:sp>
+      <p:sp>
+        <p:nvSpPr>
+          <p:cNvPr id="6" name="Rounded Rectangle 5"/>
+          <p:cNvSpPr/>
+          <p:nvPr/>
+        </p:nvSpPr>
+        <p:spPr>
+          <a:xfrm>
+            <a:off x="3695547" y="2743200"/>
+            <a:ext cx="1417320" cy="868680"/>
+          </a:xfrm>
+          <a:prstGeom prst="roundRect">
+            <a:avLst/>
+          </a:prstGeom>
+          <a:solidFill>
+            <a:srgbClr val="2E75B6"/>
+          </a:solidFill>
+          <a:ln>
+            <a:solidFill>
+              <a:srgbClr val="FFFFFF"/>
+            </a:solidFill>
+          </a:ln>
+        </p:spPr>
+        <p:style>
+          <a:lnRef idx="1">
+            <a:schemeClr val="accent1"/>
+          </a:lnRef>
+          <a:fillRef idx="3">
+            <a:schemeClr val="accent1"/>
+          </a:fillRef>
+          <a:effectRef idx="2">
+            <a:schemeClr val="accent1"/>
+          </a:effectRef>
+          <a:fontRef idx="minor">
+            <a:schemeClr val="lt1"/>
+          </a:fontRef>
+        </p:style>
+        <p:txBody>
+          <a:bodyPr rtlCol="0" anchor="ctr" wrap="square"/>
+          <a:lstStyle/>
+          <a:p>
+            <a:pPr algn="l">
+              <a:defRPr sz="1100" b="1">
+                <a:solidFill>
+                  <a:srgbClr val="FFFFFF"/>
+                </a:solidFill>
+              </a:defRPr>
+            </a:pPr>
+            <a:r>
+              <a:t>Triage</a:t>
+            </a:r>
+          </a:p>
+          <a:p>
+            <a:r>
+              <a:t>P1-P4</a:t>
+            </a:r>
+          </a:p>
+        </p:txBody>
+      </p:sp>
+      <p:sp>
+        <p:nvSpPr>
+          <p:cNvPr id="7" name="Right Arrow 6"/>
+          <p:cNvSpPr/>
+          <p:nvPr/>
+        </p:nvSpPr>
+        <p:spPr>
+          <a:xfrm>
+            <a:off x="5112867" y="2971800"/>
+            <a:ext cx="274320" cy="320040"/>
+          </a:xfrm>
+          <a:prstGeom prst="rightArrow">
+            <a:avLst/>
+          </a:prstGeom>
+          <a:solidFill>
+            <a:srgbClr val="BFBFBF"/>
+          </a:solidFill>
+          <a:ln>
+            <a:noFill/>
+          </a:ln>
+        </p:spPr>
+        <p:style>
+          <a:lnRef idx="1">
+            <a:schemeClr val="accent1"/>
+          </a:lnRef>
+          <a:fillRef idx="3">
+            <a:schemeClr val="accent1"/>
+          </a:fillRef>
+          <a:effectRef idx="2">
+            <a:schemeClr val="accent1"/>
+          </a:effectRef>
+          <a:fontRef idx="minor">
+            <a:schemeClr val="lt1"/>
+          </a:fontRef>
+        </p:style>
+        <p:txBody>
+          <a:bodyPr rtlCol="0" anchor="ctr"/>
+          <a:lstStyle/>
+          <a:p>
+            <a:pPr algn="ctr"/>
+          </a:p>
+        </p:txBody>
+      </p:sp>
+      <p:sp>
+        <p:nvSpPr>
+          <p:cNvPr id="8" name="Rounded Rectangle 7"/>
+          <p:cNvSpPr/>
+          <p:nvPr/>
+        </p:nvSpPr>
+        <p:spPr>
+          <a:xfrm>
+            <a:off x="5387187" y="2743200"/>
+            <a:ext cx="1417320" cy="868680"/>
+          </a:xfrm>
+          <a:prstGeom prst="roundRect">
+            <a:avLst/>
+          </a:prstGeom>
+          <a:solidFill>
+            <a:srgbClr val="5B9BD5"/>
+          </a:solidFill>
+          <a:ln>
+            <a:solidFill>
+              <a:srgbClr val="FFFFFF"/>
+            </a:solidFill>
+          </a:ln>
+        </p:spPr>
+        <p:style>
+          <a:lnRef idx="1">
+            <a:schemeClr val="accent1"/>
+          </a:lnRef>
+          <a:fillRef idx="3">
+            <a:schemeClr val="accent1"/>
+          </a:fillRef>
+          <a:effectRef idx="2">
+            <a:schemeClr val="accent1"/>
+          </a:effectRef>
+          <a:fontRef idx="minor">
+            <a:schemeClr val="lt1"/>
+          </a:fontRef>
+        </p:style>
+        <p:txBody>
+          <a:bodyPr rtlCol="0" anchor="ctr" wrap="square"/>
+          <a:lstStyle/>
+          <a:p>
+            <a:pPr algn="l">
+              <a:defRPr sz="1100" b="1">
+                <a:solidFill>
+                  <a:srgbClr val="FFFFFF"/>
+                </a:solidFill>
+              </a:defRPr>
+            </a:pPr>
+            <a:r>
+              <a:t>Diagnose</a:t>
+            </a:r>
+          </a:p>
+          <a:p>
+            <a:r>
+              <a:t>&amp; contain</a:t>
+            </a:r>
+          </a:p>
+        </p:txBody>
+      </p:sp>
+      <p:sp>
+        <p:nvSpPr>
+          <p:cNvPr id="9" name="Right Arrow 8"/>
+          <p:cNvSpPr/>
+          <p:nvPr/>
+        </p:nvSpPr>
+        <p:spPr>
+          <a:xfrm>
+            <a:off x="6804507" y="2971800"/>
+            <a:ext cx="274320" cy="320040"/>
+          </a:xfrm>
+          <a:prstGeom prst="rightArrow">
+            <a:avLst/>
+          </a:prstGeom>
+          <a:solidFill>
+            <a:srgbClr val="BFBFBF"/>
+          </a:solidFill>
+          <a:ln>
+            <a:noFill/>
+          </a:ln>
+        </p:spPr>
+        <p:style>
+          <a:lnRef idx="1">
+            <a:schemeClr val="accent1"/>
+          </a:lnRef>
+          <a:fillRef idx="3">
+            <a:schemeClr val="accent1"/>
+          </a:fillRef>
+          <a:effectRef idx="2">
+            <a:schemeClr val="accent1"/>
+          </a:effectRef>
+          <a:fontRef idx="minor">
+            <a:schemeClr val="lt1"/>
+          </a:fontRef>
+        </p:style>
+        <p:txBody>
+          <a:bodyPr rtlCol="0" anchor="ctr"/>
+          <a:lstStyle/>
+          <a:p>
+            <a:pPr algn="ctr"/>
+          </a:p>
+        </p:txBody>
+      </p:sp>
+      <p:sp>
+        <p:nvSpPr>
+          <p:cNvPr id="10" name="Rounded Rectangle 9"/>
+          <p:cNvSpPr/>
+          <p:nvPr/>
+        </p:nvSpPr>
+        <p:spPr>
+          <a:xfrm>
+            <a:off x="7078827" y="2743200"/>
+            <a:ext cx="1417320" cy="868680"/>
+          </a:xfrm>
+          <a:prstGeom prst="roundRect">
+            <a:avLst/>
+          </a:prstGeom>
+          <a:solidFill>
+            <a:srgbClr val="70AD47"/>
+          </a:solidFill>
+          <a:ln>
+            <a:solidFill>
+              <a:srgbClr val="FFFFFF"/>
+            </a:solidFill>
+          </a:ln>
+        </p:spPr>
+        <p:style>
+          <a:lnRef idx="1">
+            <a:schemeClr val="accent1"/>
+          </a:lnRef>
+          <a:fillRef idx="3">
+            <a:schemeClr val="accent1"/>
+          </a:fillRef>
+          <a:effectRef idx="2">
+            <a:schemeClr val="accent1"/>
+          </a:effectRef>
+          <a:fontRef idx="minor">
+            <a:schemeClr val="lt1"/>
+          </a:fontRef>
+        </p:style>
+        <p:txBody>
+          <a:bodyPr rtlCol="0" anchor="ctr" wrap="square"/>
+          <a:lstStyle/>
+          <a:p>
+            <a:pPr algn="l">
+              <a:defRPr sz="1100" b="1">
+                <a:solidFill>
+                  <a:srgbClr val="FFFFFF"/>
+                </a:solidFill>
+              </a:defRPr>
+            </a:pPr>
+            <a:r>
+              <a:t>Resolve</a:t>
+            </a:r>
+          </a:p>
+          <a:p>
+            <a:r>
+              <a:t>&amp; verify</a:t>
+            </a:r>
+          </a:p>
+        </p:txBody>
+      </p:sp>
+      <p:sp>
+        <p:nvSpPr>
+          <p:cNvPr id="11" name="Right Arrow 10"/>
+          <p:cNvSpPr/>
+          <p:nvPr/>
+        </p:nvSpPr>
+        <p:spPr>
+          <a:xfrm>
+            <a:off x="8496147" y="2971800"/>
+            <a:ext cx="274320" cy="320040"/>
+          </a:xfrm>
+          <a:prstGeom prst="rightArrow">
+            <a:avLst/>
+          </a:prstGeom>
+          <a:solidFill>
+            <a:srgbClr val="BFBFBF"/>
+          </a:solidFill>
+          <a:ln>
+            <a:noFill/>
+          </a:ln>
+        </p:spPr>
+        <p:style>
+          <a:lnRef idx="1">
+            <a:schemeClr val="accent1"/>
+          </a:lnRef>
+          <a:fillRef idx="3">
+            <a:schemeClr val="accent1"/>
+          </a:fillRef>
+          <a:effectRef idx="2">
+            <a:schemeClr val="accent1"/>
+          </a:effectRef>
+          <a:fontRef idx="minor">
+            <a:schemeClr val="lt1"/>
+          </a:fontRef>
+        </p:style>
+        <p:txBody>
+          <a:bodyPr rtlCol="0" anchor="ctr"/>
+          <a:lstStyle/>
+          <a:p>
+            <a:pPr algn="ctr"/>
+          </a:p>
+        </p:txBody>
+      </p:sp>
+      <p:sp>
+        <p:nvSpPr>
+          <p:cNvPr id="12" name="Rounded Rectangle 11"/>
+          <p:cNvSpPr/>
+          <p:nvPr/>
+        </p:nvSpPr>
+        <p:spPr>
+          <a:xfrm>
+            <a:off x="8770467" y="2743200"/>
+            <a:ext cx="1417320" cy="868680"/>
+          </a:xfrm>
+          <a:prstGeom prst="roundRect">
+            <a:avLst/>
+          </a:prstGeom>
+          <a:solidFill>
+            <a:srgbClr val="ED7D31"/>
+          </a:solidFill>
+          <a:ln>
+            <a:solidFill>
+              <a:srgbClr val="FFFFFF"/>
+            </a:solidFill>
+          </a:ln>
+        </p:spPr>
+        <p:style>
+          <a:lnRef idx="1">
+            <a:schemeClr val="accent1"/>
+          </a:lnRef>
+          <a:fillRef idx="3">
+            <a:schemeClr val="accent1"/>
+          </a:fillRef>
+          <a:effectRef idx="2">
+            <a:schemeClr val="accent1"/>
+          </a:effectRef>
+          <a:fontRef idx="minor">
+            <a:schemeClr val="lt1"/>
+          </a:fontRef>
+        </p:style>
+        <p:txBody>
+          <a:bodyPr rtlCol="0" anchor="ctr" wrap="square"/>
+          <a:lstStyle/>
+          <a:p>
+            <a:pPr algn="l">
+              <a:defRPr sz="1100" b="1">
+                <a:solidFill>
+                  <a:srgbClr val="FFFFFF"/>
+                </a:solidFill>
+              </a:defRPr>
+            </a:pPr>
+            <a:r>
+              <a:t>Post-</a:t>
+            </a:r>
+          </a:p>
+          <a:p>
+            <a:r>
+              <a:t>mortem</a:t>
             </a:r>
           </a:p>
         </p:txBody>
@@ -5974,7 +6739,7 @@
           <a:lstStyle/>
           <a:p>
             <a:r>
-              <a:t>Incident Response — Phases</a:t>
+              <a:t>Incident Priority — P1 to P4</a:t>
             </a:r>
           </a:p>
         </p:txBody>
@@ -5995,37 +6760,40 @@
           <a:lstStyle/>
           <a:p>
             <a:r>
-              <a:t>DETECT     Monitor + user report → log incident in ITSM</a:t>
-            </a:r>
-          </a:p>
-          <a:p>
-            <a:r>
-              <a:t>TRIAGE     Classify P1–P4; open war room if P1/P2</a:t>
-            </a:r>
-          </a:p>
-          <a:p>
-            <a:r>
-              <a:t>DIAGNOSE   Logs, metrics, recent CRs — IT only</a:t>
-            </a:r>
-          </a:p>
-          <a:p>
-            <a:r>
-              <a:t>CONTAIN    Rollback, disable feature, scale — document decision</a:t>
-            </a:r>
-          </a:p>
-          <a:p>
-            <a:r>
-              <a:t>RESOLVE    Fix deploy or data repair WITH business approval only</a:t>
-            </a:r>
-          </a:p>
-          <a:p>
-            <a:r>
-              <a:t>RECOVER    Verify monitoring green; business confirms ops resumed</a:t>
-            </a:r>
-          </a:p>
-          <a:p>
-            <a:r>
-              <a:t>CLOSE      Timeline in ITSM; post-mortem if P1/P2 or repeat</a:t>
+              <a:t>P1 CRITICAL — major business stop (core banking down, mass POS fail)</a:t>
+            </a:r>
+          </a:p>
+          <a:p>
+            <a:r>
+              <a:t>   Notify within 30 min: Ops, IT-Security, CIO, EXCO</a:t>
+            </a:r>
+          </a:p>
+          <a:p/>
+          <a:p>
+            <a:r>
+              <a:t>P2 MAJOR — significant degradation (login fail, collections batch stuck)</a:t>
+            </a:r>
+          </a:p>
+          <a:p>
+            <a:r>
+              <a:t>   Notify within 1 hr: Ops, IT Product, Sponsor</a:t>
+            </a:r>
+          </a:p>
+          <a:p/>
+          <a:p>
+            <a:r>
+              <a:t>P3 MODERATE — workaround exists (single region slow)</a:t>
+            </a:r>
+          </a:p>
+          <a:p>
+            <a:r>
+              <a:t>   Notify within 4 hr</a:t>
+            </a:r>
+          </a:p>
+          <a:p/>
+          <a:p>
+            <a:r>
+              <a:t>P4 MINOR — cosmetic / single user → next business day</a:t>
             </a:r>
           </a:p>
         </p:txBody>
@@ -6064,7 +6832,7 @@
           <a:lstStyle/>
           <a:p>
             <a:r>
-              <a:t>War Room Checklist — P1 / P2</a:t>
+              <a:t>Incident Response — Phases</a:t>
             </a:r>
           </a:p>
         </p:txBody>
@@ -6085,42 +6853,37 @@
           <a:lstStyle/>
           <a:p>
             <a:r>
-              <a:t>☐ Incident commander appointed (Ops Manager)</a:t>
-            </a:r>
-          </a:p>
-          <a:p>
-            <a:r>
-              <a:t>☐ Timeline log — 5-minute updates</a:t>
-            </a:r>
-          </a:p>
-          <a:p>
-            <a:r>
-              <a:t>☐ IT-Security notified if data / access impact</a:t>
-            </a:r>
-          </a:p>
-          <a:p>
-            <a:r>
-              <a:t>☐ Business liaison on bridge (does NOT decide IT technical actions)</a:t>
-            </a:r>
-          </a:p>
-          <a:p>
-            <a:r>
-              <a:t>☐ GRC notified if regulatory impact</a:t>
-            </a:r>
-          </a:p>
-          <a:p>
-            <a:r>
-              <a:t>☐ Customer comms draft — Legal if customer-facing</a:t>
-            </a:r>
-          </a:p>
-          <a:p>
-            <a:r>
-              <a:t>☐ Rollback decision documented</a:t>
-            </a:r>
-          </a:p>
-          <a:p>
-            <a:r>
-              <a:t>☐ Post-mortem scheduled within 5 business days</a:t>
+              <a:t>DETECT     Monitor + user report → log incident in ITSM</a:t>
+            </a:r>
+          </a:p>
+          <a:p>
+            <a:r>
+              <a:t>TRIAGE     Classify P1–P4; open war room if P1/P2</a:t>
+            </a:r>
+          </a:p>
+          <a:p>
+            <a:r>
+              <a:t>DIAGNOSE   Logs, metrics, recent CRs — IT only</a:t>
+            </a:r>
+          </a:p>
+          <a:p>
+            <a:r>
+              <a:t>CONTAIN    Rollback, disable feature, scale — document decision</a:t>
+            </a:r>
+          </a:p>
+          <a:p>
+            <a:r>
+              <a:t>RESOLVE    Fix deploy or data repair WITH business approval only</a:t>
+            </a:r>
+          </a:p>
+          <a:p>
+            <a:r>
+              <a:t>RECOVER    Verify monitoring green; business confirms ops resumed</a:t>
+            </a:r>
+          </a:p>
+          <a:p>
+            <a:r>
+              <a:t>CLOSE      Timeline in ITSM; post-mortem if P1/P2 or repeat</a:t>
             </a:r>
           </a:p>
         </p:txBody>
@@ -6159,872 +6922,63 @@
           <a:lstStyle/>
           <a:p>
             <a:r>
-              <a:t>BOD Runbook — Window 04:00 to 08:00</a:t>
-            </a:r>
-          </a:p>
-        </p:txBody>
-      </p:sp>
-      <p:sp>
-        <p:nvSpPr>
-          <p:cNvPr id="3" name="TextBox 2"/>
-          <p:cNvSpPr txBox="1"/>
-          <p:nvPr/>
-        </p:nvSpPr>
-        <p:spPr>
-          <a:xfrm>
-            <a:off x="457200" y="960120"/>
-            <a:ext cx="11247120" cy="320040"/>
-          </a:xfrm>
-          <a:prstGeom prst="rect">
-            <a:avLst/>
-          </a:prstGeom>
-          <a:noFill/>
-        </p:spPr>
-        <p:txBody>
-          <a:bodyPr wrap="none">
-            <a:spAutoFit/>
-          </a:bodyPr>
-          <a:lstStyle/>
-          <a:p>
-            <a:pPr>
-              <a:defRPr sz="1300">
-                <a:solidFill>
-                  <a:srgbClr val="555555"/>
-                </a:solidFill>
-              </a:defRPr>
-            </a:pPr>
-            <a:r>
-              <a:t>Weekend: BOD + EOD; day max 4h only on trigger · Ops Manager approves roster</a:t>
-            </a:r>
-          </a:p>
-        </p:txBody>
-      </p:sp>
-      <p:sp>
-        <p:nvSpPr>
-          <p:cNvPr id="4" name="Oval 3"/>
-          <p:cNvSpPr/>
-          <p:nvPr/>
-        </p:nvSpPr>
-        <p:spPr>
-          <a:xfrm>
-            <a:off x="502920" y="1234440"/>
-            <a:ext cx="347472" cy="347472"/>
-          </a:xfrm>
-          <a:prstGeom prst="ellipse">
-            <a:avLst/>
-          </a:prstGeom>
-          <a:solidFill>
-            <a:srgbClr val="00A651"/>
-          </a:solidFill>
-          <a:ln>
-            <a:noFill/>
-          </a:ln>
-        </p:spPr>
-        <p:style>
-          <a:lnRef idx="1">
-            <a:schemeClr val="accent1"/>
-          </a:lnRef>
-          <a:fillRef idx="3">
-            <a:schemeClr val="accent1"/>
-          </a:fillRef>
-          <a:effectRef idx="2">
-            <a:schemeClr val="accent1"/>
-          </a:effectRef>
-          <a:fontRef idx="minor">
-            <a:schemeClr val="lt1"/>
-          </a:fontRef>
-        </p:style>
-        <p:txBody>
-          <a:bodyPr rtlCol="0" anchor="ctr"/>
-          <a:lstStyle/>
-          <a:p>
-            <a:pPr algn="l">
-              <a:defRPr sz="1100" b="1">
-                <a:solidFill>
-                  <a:srgbClr val="FFFFFF"/>
-                </a:solidFill>
-              </a:defRPr>
-            </a:pPr>
-            <a:r>
-              <a:t>1</a:t>
-            </a:r>
-          </a:p>
-        </p:txBody>
-      </p:sp>
-      <p:sp>
-        <p:nvSpPr>
-          <p:cNvPr id="5" name="TextBox 4"/>
-          <p:cNvSpPr txBox="1"/>
-          <p:nvPr/>
-        </p:nvSpPr>
-        <p:spPr>
-          <a:xfrm>
-            <a:off x="941832" y="1216152"/>
-            <a:ext cx="5394960" cy="502920"/>
-          </a:xfrm>
-          <a:prstGeom prst="rect">
-            <a:avLst/>
-          </a:prstGeom>
-          <a:noFill/>
-        </p:spPr>
-        <p:txBody>
-          <a:bodyPr wrap="square">
-            <a:spAutoFit/>
-          </a:bodyPr>
-          <a:lstStyle/>
-          <a:p>
-            <a:pPr>
-              <a:defRPr sz="1200"/>
-            </a:pPr>
-            <a:r>
-              <a:t>04:00 — Open BOD; handover from night shift (20:00–24:00 prior day)</a:t>
-            </a:r>
-          </a:p>
-        </p:txBody>
-      </p:sp>
-      <p:sp>
-        <p:nvSpPr>
-          <p:cNvPr id="6" name="Oval 5"/>
-          <p:cNvSpPr/>
-          <p:nvPr/>
-        </p:nvSpPr>
-        <p:spPr>
-          <a:xfrm>
-            <a:off x="502920" y="1892808"/>
-            <a:ext cx="347472" cy="347472"/>
-          </a:xfrm>
-          <a:prstGeom prst="ellipse">
-            <a:avLst/>
-          </a:prstGeom>
-          <a:solidFill>
-            <a:srgbClr val="00A651"/>
-          </a:solidFill>
-          <a:ln>
-            <a:noFill/>
-          </a:ln>
-        </p:spPr>
-        <p:style>
-          <a:lnRef idx="1">
-            <a:schemeClr val="accent1"/>
-          </a:lnRef>
-          <a:fillRef idx="3">
-            <a:schemeClr val="accent1"/>
-          </a:fillRef>
-          <a:effectRef idx="2">
-            <a:schemeClr val="accent1"/>
-          </a:effectRef>
-          <a:fontRef idx="minor">
-            <a:schemeClr val="lt1"/>
-          </a:fontRef>
-        </p:style>
-        <p:txBody>
-          <a:bodyPr rtlCol="0" anchor="ctr"/>
-          <a:lstStyle/>
-          <a:p>
-            <a:pPr algn="l">
-              <a:defRPr sz="1100" b="1">
-                <a:solidFill>
-                  <a:srgbClr val="FFFFFF"/>
-                </a:solidFill>
-              </a:defRPr>
-            </a:pPr>
-            <a:r>
-              <a:t>2</a:t>
-            </a:r>
-          </a:p>
-        </p:txBody>
-      </p:sp>
-      <p:sp>
-        <p:nvSpPr>
-          <p:cNvPr id="7" name="TextBox 6"/>
-          <p:cNvSpPr txBox="1"/>
-          <p:nvPr/>
-        </p:nvSpPr>
-        <p:spPr>
-          <a:xfrm>
-            <a:off x="941832" y="1874520"/>
-            <a:ext cx="5394960" cy="502920"/>
-          </a:xfrm>
-          <a:prstGeom prst="rect">
-            <a:avLst/>
-          </a:prstGeom>
-          <a:noFill/>
-        </p:spPr>
-        <p:txBody>
-          <a:bodyPr wrap="square">
-            <a:spAutoFit/>
-          </a:bodyPr>
-          <a:lstStyle/>
-          <a:p>
-            <a:pPr>
-              <a:defRPr sz="1200"/>
-            </a:pPr>
-            <a:r>
-              <a:t>Review overnight P1/P2 — none open or unowned</a:t>
-            </a:r>
-          </a:p>
-        </p:txBody>
-      </p:sp>
-      <p:sp>
-        <p:nvSpPr>
-          <p:cNvPr id="8" name="Oval 7"/>
-          <p:cNvSpPr/>
-          <p:nvPr/>
-        </p:nvSpPr>
-        <p:spPr>
-          <a:xfrm>
-            <a:off x="502920" y="2551176"/>
-            <a:ext cx="347472" cy="347472"/>
-          </a:xfrm>
-          <a:prstGeom prst="ellipse">
-            <a:avLst/>
-          </a:prstGeom>
-          <a:solidFill>
-            <a:srgbClr val="00A651"/>
-          </a:solidFill>
-          <a:ln>
-            <a:noFill/>
-          </a:ln>
-        </p:spPr>
-        <p:style>
-          <a:lnRef idx="1">
-            <a:schemeClr val="accent1"/>
-          </a:lnRef>
-          <a:fillRef idx="3">
-            <a:schemeClr val="accent1"/>
-          </a:fillRef>
-          <a:effectRef idx="2">
-            <a:schemeClr val="accent1"/>
-          </a:effectRef>
-          <a:fontRef idx="minor">
-            <a:schemeClr val="lt1"/>
-          </a:fontRef>
-        </p:style>
-        <p:txBody>
-          <a:bodyPr rtlCol="0" anchor="ctr"/>
-          <a:lstStyle/>
-          <a:p>
-            <a:pPr algn="l">
-              <a:defRPr sz="1100" b="1">
-                <a:solidFill>
-                  <a:srgbClr val="FFFFFF"/>
-                </a:solidFill>
-              </a:defRPr>
-            </a:pPr>
-            <a:r>
-              <a:t>3</a:t>
-            </a:r>
-          </a:p>
-        </p:txBody>
-      </p:sp>
-      <p:sp>
-        <p:nvSpPr>
-          <p:cNvPr id="9" name="TextBox 8"/>
-          <p:cNvSpPr txBox="1"/>
-          <p:nvPr/>
-        </p:nvSpPr>
-        <p:spPr>
-          <a:xfrm>
-            <a:off x="941832" y="2532888"/>
-            <a:ext cx="5394960" cy="502920"/>
-          </a:xfrm>
-          <a:prstGeom prst="rect">
-            <a:avLst/>
-          </a:prstGeom>
-          <a:noFill/>
-        </p:spPr>
-        <p:txBody>
-          <a:bodyPr wrap="square">
-            <a:spAutoFit/>
-          </a:bodyPr>
-          <a:lstStyle/>
-          <a:p>
-            <a:pPr>
-              <a:defRPr sz="1200"/>
-            </a:pPr>
-            <a:r>
-              <a:t>Confirm production health + overnight batch jobs complete</a:t>
-            </a:r>
-          </a:p>
-        </p:txBody>
-      </p:sp>
-      <p:sp>
-        <p:nvSpPr>
-          <p:cNvPr id="10" name="Oval 9"/>
-          <p:cNvSpPr/>
-          <p:nvPr/>
-        </p:nvSpPr>
-        <p:spPr>
-          <a:xfrm>
-            <a:off x="502920" y="3209544"/>
-            <a:ext cx="347472" cy="347472"/>
-          </a:xfrm>
-          <a:prstGeom prst="ellipse">
-            <a:avLst/>
-          </a:prstGeom>
-          <a:solidFill>
-            <a:srgbClr val="00A651"/>
-          </a:solidFill>
-          <a:ln>
-            <a:noFill/>
-          </a:ln>
-        </p:spPr>
-        <p:style>
-          <a:lnRef idx="1">
-            <a:schemeClr val="accent1"/>
-          </a:lnRef>
-          <a:fillRef idx="3">
-            <a:schemeClr val="accent1"/>
-          </a:fillRef>
-          <a:effectRef idx="2">
-            <a:schemeClr val="accent1"/>
-          </a:effectRef>
-          <a:fontRef idx="minor">
-            <a:schemeClr val="lt1"/>
-          </a:fontRef>
-        </p:style>
-        <p:txBody>
-          <a:bodyPr rtlCol="0" anchor="ctr"/>
-          <a:lstStyle/>
-          <a:p>
-            <a:pPr algn="l">
-              <a:defRPr sz="1100" b="1">
-                <a:solidFill>
-                  <a:srgbClr val="FFFFFF"/>
-                </a:solidFill>
-              </a:defRPr>
-            </a:pPr>
-            <a:r>
-              <a:t>4</a:t>
-            </a:r>
-          </a:p>
-        </p:txBody>
-      </p:sp>
-      <p:sp>
-        <p:nvSpPr>
-          <p:cNvPr id="11" name="TextBox 10"/>
-          <p:cNvSpPr txBox="1"/>
-          <p:nvPr/>
-        </p:nvSpPr>
-        <p:spPr>
-          <a:xfrm>
-            <a:off x="941832" y="3191256"/>
-            <a:ext cx="5394960" cy="502920"/>
-          </a:xfrm>
-          <a:prstGeom prst="rect">
-            <a:avLst/>
-          </a:prstGeom>
-          <a:noFill/>
-        </p:spPr>
-        <p:txBody>
-          <a:bodyPr wrap="square">
-            <a:spAutoFit/>
-          </a:bodyPr>
-          <a:lstStyle/>
-          <a:p>
-            <a:pPr>
-              <a:defRPr sz="1200"/>
-            </a:pPr>
-            <a:r>
-              <a:t>List releases today — CR approved? UAT linked?</a:t>
-            </a:r>
-          </a:p>
-        </p:txBody>
-      </p:sp>
-      <p:sp>
-        <p:nvSpPr>
-          <p:cNvPr id="12" name="Oval 11"/>
-          <p:cNvSpPr/>
-          <p:nvPr/>
-        </p:nvSpPr>
-        <p:spPr>
-          <a:xfrm>
-            <a:off x="502920" y="3867912"/>
-            <a:ext cx="347472" cy="347472"/>
-          </a:xfrm>
-          <a:prstGeom prst="ellipse">
-            <a:avLst/>
-          </a:prstGeom>
-          <a:solidFill>
-            <a:srgbClr val="00A651"/>
-          </a:solidFill>
-          <a:ln>
-            <a:noFill/>
-          </a:ln>
-        </p:spPr>
-        <p:style>
-          <a:lnRef idx="1">
-            <a:schemeClr val="accent1"/>
-          </a:lnRef>
-          <a:fillRef idx="3">
-            <a:schemeClr val="accent1"/>
-          </a:fillRef>
-          <a:effectRef idx="2">
-            <a:schemeClr val="accent1"/>
-          </a:effectRef>
-          <a:fontRef idx="minor">
-            <a:schemeClr val="lt1"/>
-          </a:fontRef>
-        </p:style>
-        <p:txBody>
-          <a:bodyPr rtlCol="0" anchor="ctr"/>
-          <a:lstStyle/>
-          <a:p>
-            <a:pPr algn="l">
-              <a:defRPr sz="1100" b="1">
-                <a:solidFill>
-                  <a:srgbClr val="FFFFFF"/>
-                </a:solidFill>
-              </a:defRPr>
-            </a:pPr>
-            <a:r>
-              <a:t>5</a:t>
-            </a:r>
-          </a:p>
-        </p:txBody>
-      </p:sp>
-      <p:sp>
-        <p:nvSpPr>
-          <p:cNvPr id="13" name="TextBox 12"/>
-          <p:cNvSpPr txBox="1"/>
-          <p:nvPr/>
-        </p:nvSpPr>
-        <p:spPr>
-          <a:xfrm>
-            <a:off x="941832" y="3849624"/>
-            <a:ext cx="5394960" cy="502920"/>
-          </a:xfrm>
-          <a:prstGeom prst="rect">
-            <a:avLst/>
-          </a:prstGeom>
-          <a:noFill/>
-        </p:spPr>
-        <p:txBody>
-          <a:bodyPr wrap="square">
-            <a:spAutoFit/>
-          </a:bodyPr>
-          <a:lstStyle/>
-          <a:p>
-            <a:pPr>
-              <a:defRPr sz="1200"/>
-            </a:pPr>
-            <a:r>
-              <a:t>CAB outcomes — failed deploy? Hypercare check</a:t>
-            </a:r>
-          </a:p>
-        </p:txBody>
-      </p:sp>
-      <p:sp>
-        <p:nvSpPr>
-          <p:cNvPr id="14" name="Oval 13"/>
-          <p:cNvSpPr/>
-          <p:nvPr/>
-        </p:nvSpPr>
-        <p:spPr>
-          <a:xfrm>
-            <a:off x="6263640" y="1234440"/>
-            <a:ext cx="347472" cy="347472"/>
-          </a:xfrm>
-          <a:prstGeom prst="ellipse">
-            <a:avLst/>
-          </a:prstGeom>
-          <a:solidFill>
-            <a:srgbClr val="00A651"/>
-          </a:solidFill>
-          <a:ln>
-            <a:noFill/>
-          </a:ln>
-        </p:spPr>
-        <p:style>
-          <a:lnRef idx="1">
-            <a:schemeClr val="accent1"/>
-          </a:lnRef>
-          <a:fillRef idx="3">
-            <a:schemeClr val="accent1"/>
-          </a:fillRef>
-          <a:effectRef idx="2">
-            <a:schemeClr val="accent1"/>
-          </a:effectRef>
-          <a:fontRef idx="minor">
-            <a:schemeClr val="lt1"/>
-          </a:fontRef>
-        </p:style>
-        <p:txBody>
-          <a:bodyPr rtlCol="0" anchor="ctr"/>
-          <a:lstStyle/>
-          <a:p>
-            <a:pPr algn="l">
-              <a:defRPr sz="1100" b="1">
-                <a:solidFill>
-                  <a:srgbClr val="FFFFFF"/>
-                </a:solidFill>
-              </a:defRPr>
-            </a:pPr>
-            <a:r>
-              <a:t>6</a:t>
-            </a:r>
-          </a:p>
-        </p:txBody>
-      </p:sp>
-      <p:sp>
-        <p:nvSpPr>
-          <p:cNvPr id="15" name="TextBox 14"/>
-          <p:cNvSpPr txBox="1"/>
-          <p:nvPr/>
-        </p:nvSpPr>
-        <p:spPr>
-          <a:xfrm>
-            <a:off x="6702552" y="1216152"/>
-            <a:ext cx="5394960" cy="502920"/>
-          </a:xfrm>
-          <a:prstGeom prst="rect">
-            <a:avLst/>
-          </a:prstGeom>
-          <a:noFill/>
-        </p:spPr>
-        <p:txBody>
-          <a:bodyPr wrap="square">
-            <a:spAutoFit/>
-          </a:bodyPr>
-          <a:lstStyle/>
-          <a:p>
-            <a:pPr>
-              <a:defRPr sz="1200"/>
-            </a:pPr>
-            <a:r>
-              <a:t>Wrong-bucket SR count; BRD queue &gt; 5 days? Escalate</a:t>
-            </a:r>
-          </a:p>
-        </p:txBody>
-      </p:sp>
-      <p:sp>
-        <p:nvSpPr>
-          <p:cNvPr id="16" name="Oval 15"/>
-          <p:cNvSpPr/>
-          <p:nvPr/>
-        </p:nvSpPr>
-        <p:spPr>
-          <a:xfrm>
-            <a:off x="6263640" y="1892808"/>
-            <a:ext cx="347472" cy="347472"/>
-          </a:xfrm>
-          <a:prstGeom prst="ellipse">
-            <a:avLst/>
-          </a:prstGeom>
-          <a:solidFill>
-            <a:srgbClr val="00A651"/>
-          </a:solidFill>
-          <a:ln>
-            <a:noFill/>
-          </a:ln>
-        </p:spPr>
-        <p:style>
-          <a:lnRef idx="1">
-            <a:schemeClr val="accent1"/>
-          </a:lnRef>
-          <a:fillRef idx="3">
-            <a:schemeClr val="accent1"/>
-          </a:fillRef>
-          <a:effectRef idx="2">
-            <a:schemeClr val="accent1"/>
-          </a:effectRef>
-          <a:fontRef idx="minor">
-            <a:schemeClr val="lt1"/>
-          </a:fontRef>
-        </p:style>
-        <p:txBody>
-          <a:bodyPr rtlCol="0" anchor="ctr"/>
-          <a:lstStyle/>
-          <a:p>
-            <a:pPr algn="l">
-              <a:defRPr sz="1100" b="1">
-                <a:solidFill>
-                  <a:srgbClr val="FFFFFF"/>
-                </a:solidFill>
-              </a:defRPr>
-            </a:pPr>
-            <a:r>
-              <a:t>7</a:t>
-            </a:r>
-          </a:p>
-        </p:txBody>
-      </p:sp>
-      <p:sp>
-        <p:nvSpPr>
-          <p:cNvPr id="17" name="TextBox 16"/>
-          <p:cNvSpPr txBox="1"/>
-          <p:nvPr/>
-        </p:nvSpPr>
-        <p:spPr>
-          <a:xfrm>
-            <a:off x="6702552" y="1874520"/>
-            <a:ext cx="5394960" cy="502920"/>
-          </a:xfrm>
-          <a:prstGeom prst="rect">
-            <a:avLst/>
-          </a:prstGeom>
-          <a:noFill/>
-        </p:spPr>
-        <p:txBody>
-          <a:bodyPr wrap="square">
-            <a:spAutoFit/>
-          </a:bodyPr>
-          <a:lstStyle/>
-          <a:p>
-            <a:pPr>
-              <a:defRPr sz="1200"/>
-            </a:pPr>
-            <a:r>
-              <a:t>07:30 — Confirm apps green for business user allocation</a:t>
-            </a:r>
-          </a:p>
-        </p:txBody>
-      </p:sp>
-      <p:sp>
-        <p:nvSpPr>
-          <p:cNvPr id="18" name="Oval 17"/>
-          <p:cNvSpPr/>
-          <p:nvPr/>
-        </p:nvSpPr>
-        <p:spPr>
-          <a:xfrm>
-            <a:off x="6263640" y="2551176"/>
-            <a:ext cx="347472" cy="347472"/>
-          </a:xfrm>
-          <a:prstGeom prst="ellipse">
-            <a:avLst/>
-          </a:prstGeom>
-          <a:solidFill>
-            <a:srgbClr val="00A651"/>
-          </a:solidFill>
-          <a:ln>
-            <a:noFill/>
-          </a:ln>
-        </p:spPr>
-        <p:style>
-          <a:lnRef idx="1">
-            <a:schemeClr val="accent1"/>
-          </a:lnRef>
-          <a:fillRef idx="3">
-            <a:schemeClr val="accent1"/>
-          </a:fillRef>
-          <a:effectRef idx="2">
-            <a:schemeClr val="accent1"/>
-          </a:effectRef>
-          <a:fontRef idx="minor">
-            <a:schemeClr val="lt1"/>
-          </a:fontRef>
-        </p:style>
-        <p:txBody>
-          <a:bodyPr rtlCol="0" anchor="ctr"/>
-          <a:lstStyle/>
-          <a:p>
-            <a:pPr algn="l">
-              <a:defRPr sz="1100" b="1">
-                <a:solidFill>
-                  <a:srgbClr val="FFFFFF"/>
-                </a:solidFill>
-              </a:defRPr>
-            </a:pPr>
-            <a:r>
-              <a:t>8</a:t>
-            </a:r>
-          </a:p>
-        </p:txBody>
-      </p:sp>
-      <p:sp>
-        <p:nvSpPr>
-          <p:cNvPr id="19" name="TextBox 18"/>
-          <p:cNvSpPr txBox="1"/>
-          <p:nvPr/>
-        </p:nvSpPr>
-        <p:spPr>
-          <a:xfrm>
-            <a:off x="6702552" y="2532888"/>
-            <a:ext cx="5394960" cy="502920"/>
-          </a:xfrm>
-          <a:prstGeom prst="rect">
-            <a:avLst/>
-          </a:prstGeom>
-          <a:noFill/>
-        </p:spPr>
-        <p:txBody>
-          <a:bodyPr wrap="square">
-            <a:spAutoFit/>
-          </a:bodyPr>
-          <a:lstStyle/>
-          <a:p>
-            <a:pPr>
-              <a:defRPr sz="1200"/>
-            </a:pPr>
-            <a:r>
-              <a:t>Weekend? Approve extended day roster only if data late / incident</a:t>
-            </a:r>
-          </a:p>
-        </p:txBody>
-      </p:sp>
-      <p:sp>
-        <p:nvSpPr>
-          <p:cNvPr id="20" name="Oval 19"/>
-          <p:cNvSpPr/>
-          <p:nvPr/>
-        </p:nvSpPr>
-        <p:spPr>
-          <a:xfrm>
-            <a:off x="6263640" y="3209544"/>
-            <a:ext cx="347472" cy="347472"/>
-          </a:xfrm>
-          <a:prstGeom prst="ellipse">
-            <a:avLst/>
-          </a:prstGeom>
-          <a:solidFill>
-            <a:srgbClr val="00A651"/>
-          </a:solidFill>
-          <a:ln>
-            <a:noFill/>
-          </a:ln>
-        </p:spPr>
-        <p:style>
-          <a:lnRef idx="1">
-            <a:schemeClr val="accent1"/>
-          </a:lnRef>
-          <a:fillRef idx="3">
-            <a:schemeClr val="accent1"/>
-          </a:fillRef>
-          <a:effectRef idx="2">
-            <a:schemeClr val="accent1"/>
-          </a:effectRef>
-          <a:fontRef idx="minor">
-            <a:schemeClr val="lt1"/>
-          </a:fontRef>
-        </p:style>
-        <p:txBody>
-          <a:bodyPr rtlCol="0" anchor="ctr"/>
-          <a:lstStyle/>
-          <a:p>
-            <a:pPr algn="l">
-              <a:defRPr sz="1100" b="1">
-                <a:solidFill>
-                  <a:srgbClr val="FFFFFF"/>
-                </a:solidFill>
-              </a:defRPr>
-            </a:pPr>
-            <a:r>
-              <a:t>9</a:t>
-            </a:r>
-          </a:p>
-        </p:txBody>
-      </p:sp>
-      <p:sp>
-        <p:nvSpPr>
-          <p:cNvPr id="21" name="TextBox 20"/>
-          <p:cNvSpPr txBox="1"/>
-          <p:nvPr/>
-        </p:nvSpPr>
-        <p:spPr>
-          <a:xfrm>
-            <a:off x="6702552" y="3191256"/>
-            <a:ext cx="5394960" cy="502920"/>
-          </a:xfrm>
-          <a:prstGeom prst="rect">
-            <a:avLst/>
-          </a:prstGeom>
-          <a:noFill/>
-        </p:spPr>
-        <p:txBody>
-          <a:bodyPr wrap="square">
-            <a:spAutoFit/>
-          </a:bodyPr>
-          <a:lstStyle/>
-          <a:p>
-            <a:pPr>
-              <a:defRPr sz="1200"/>
-            </a:pPr>
-            <a:r>
-              <a:t>08:00 — Publish BOD log; assign day-shift escalation path</a:t>
-            </a:r>
-          </a:p>
-        </p:txBody>
-      </p:sp>
-      <p:sp>
-        <p:nvSpPr>
-          <p:cNvPr id="22" name="Oval 21"/>
-          <p:cNvSpPr/>
-          <p:nvPr/>
-        </p:nvSpPr>
-        <p:spPr>
-          <a:xfrm>
-            <a:off x="6263640" y="3867912"/>
-            <a:ext cx="347472" cy="347472"/>
-          </a:xfrm>
-          <a:prstGeom prst="ellipse">
-            <a:avLst/>
-          </a:prstGeom>
-          <a:solidFill>
-            <a:srgbClr val="00A651"/>
-          </a:solidFill>
-          <a:ln>
-            <a:noFill/>
-          </a:ln>
-        </p:spPr>
-        <p:style>
-          <a:lnRef idx="1">
-            <a:schemeClr val="accent1"/>
-          </a:lnRef>
-          <a:fillRef idx="3">
-            <a:schemeClr val="accent1"/>
-          </a:fillRef>
-          <a:effectRef idx="2">
-            <a:schemeClr val="accent1"/>
-          </a:effectRef>
-          <a:fontRef idx="minor">
-            <a:schemeClr val="lt1"/>
-          </a:fontRef>
-        </p:style>
-        <p:txBody>
-          <a:bodyPr rtlCol="0" anchor="ctr"/>
-          <a:lstStyle/>
-          <a:p>
-            <a:pPr algn="l">
-              <a:defRPr sz="1100" b="1">
-                <a:solidFill>
-                  <a:srgbClr val="FFFFFF"/>
-                </a:solidFill>
-              </a:defRPr>
-            </a:pPr>
-            <a:r>
-              <a:t>10</a:t>
-            </a:r>
-          </a:p>
-        </p:txBody>
-      </p:sp>
-      <p:sp>
-        <p:nvSpPr>
-          <p:cNvPr id="23" name="TextBox 22"/>
-          <p:cNvSpPr txBox="1"/>
-          <p:nvPr/>
-        </p:nvSpPr>
-        <p:spPr>
-          <a:xfrm>
-            <a:off x="6702552" y="3849624"/>
-            <a:ext cx="5394960" cy="502920"/>
-          </a:xfrm>
-          <a:prstGeom prst="rect">
-            <a:avLst/>
-          </a:prstGeom>
-          <a:noFill/>
-        </p:spPr>
-        <p:txBody>
-          <a:bodyPr wrap="square">
-            <a:spAutoFit/>
-          </a:bodyPr>
-          <a:lstStyle/>
-          <a:p>
-            <a:pPr>
-              <a:defRPr sz="1200"/>
-            </a:pPr>
-            <a:r>
-              <a:t>08:30 — Day shift (08:30–17:30) assumes Service Desk lead</a:t>
+              <a:t>War Room Checklist — P1 / P2</a:t>
+            </a:r>
+          </a:p>
+        </p:txBody>
+      </p:sp>
+      <p:sp>
+        <p:nvSpPr>
+          <p:cNvPr id="3" name="Content Placeholder 2"/>
+          <p:cNvSpPr>
+            <a:spLocks noGrp="1"/>
+          </p:cNvSpPr>
+          <p:nvPr>
+            <p:ph idx="1"/>
+          </p:nvPr>
+        </p:nvSpPr>
+        <p:spPr/>
+        <p:txBody>
+          <a:bodyPr/>
+          <a:lstStyle/>
+          <a:p>
+            <a:r>
+              <a:t>☐ Incident commander appointed (Ops Manager)</a:t>
+            </a:r>
+          </a:p>
+          <a:p>
+            <a:r>
+              <a:t>☐ Timeline log — 5-minute updates</a:t>
+            </a:r>
+          </a:p>
+          <a:p>
+            <a:r>
+              <a:t>☐ IT-Security notified if data / access impact</a:t>
+            </a:r>
+          </a:p>
+          <a:p>
+            <a:r>
+              <a:t>☐ Business liaison on bridge (does NOT decide IT technical actions)</a:t>
+            </a:r>
+          </a:p>
+          <a:p>
+            <a:r>
+              <a:t>☐ GRC notified if regulatory impact</a:t>
+            </a:r>
+          </a:p>
+          <a:p>
+            <a:r>
+              <a:t>☐ Customer comms draft — Legal if customer-facing</a:t>
+            </a:r>
+          </a:p>
+          <a:p>
+            <a:r>
+              <a:t>☐ Rollback decision documented</a:t>
+            </a:r>
+          </a:p>
+          <a:p>
+            <a:r>
+              <a:t>☐ Post-mortem scheduled within 5 business days</a:t>
             </a:r>
           </a:p>
         </p:txBody>
@@ -7063,70 +7017,872 @@
           <a:lstStyle/>
           <a:p>
             <a:r>
-              <a:t>System Monitoring — All Day</a:t>
-            </a:r>
-          </a:p>
-        </p:txBody>
-      </p:sp>
-      <p:sp>
-        <p:nvSpPr>
-          <p:cNvPr id="3" name="Content Placeholder 2"/>
-          <p:cNvSpPr>
-            <a:spLocks noGrp="1"/>
-          </p:cNvSpPr>
-          <p:nvPr>
-            <p:ph idx="1"/>
-          </p:nvPr>
-        </p:nvSpPr>
-        <p:spPr/>
-        <p:txBody>
-          <a:bodyPr/>
-          <a:lstStyle/>
-          <a:p>
-            <a:r>
-              <a:t>Weekday: day shift (08:30–17:30) + night (20:00–24:00) on-call:</a:t>
-            </a:r>
-          </a:p>
-          <a:p/>
-          <a:p>
-            <a:r>
-              <a:t>☐ Production health dashboard (green / amber / red)</a:t>
-            </a:r>
-          </a:p>
-          <a:p>
-            <a:r>
-              <a:t>☐ Alert queue — no unacknowledged critical alerts &gt; 15 min</a:t>
-            </a:r>
-          </a:p>
-          <a:p>
-            <a:r>
-              <a:t>☐ Batch / EOD jobs — lending, collections, GL cut-offs</a:t>
-            </a:r>
-          </a:p>
-          <a:p>
-            <a:r>
-              <a:t>☐ Integration queues — Finacle, FE ONLINE, POS, $NAP</a:t>
-            </a:r>
-          </a:p>
-          <a:p>
-            <a:r>
-              <a:t>☐ Hypercare releases — daily Sponsor check (T+1 to T+14)</a:t>
-            </a:r>
-          </a:p>
-          <a:p>
-            <a:r>
-              <a:t>☐ Capacity — CPU, disk, connection pools on critical paths</a:t>
-            </a:r>
-          </a:p>
-          <a:p>
-            <a:r>
-              <a:t>☐ Security — failed login spikes, WAF blocks (escalate IT-Security)</a:t>
-            </a:r>
-          </a:p>
-          <a:p/>
-          <a:p>
-            <a:r>
-              <a:t>Amber → investigate. Red → incident process.</a:t>
+              <a:t>BOD Runbook — Window 04:00 to 08:00</a:t>
+            </a:r>
+          </a:p>
+        </p:txBody>
+      </p:sp>
+      <p:sp>
+        <p:nvSpPr>
+          <p:cNvPr id="3" name="TextBox 2"/>
+          <p:cNvSpPr txBox="1"/>
+          <p:nvPr/>
+        </p:nvSpPr>
+        <p:spPr>
+          <a:xfrm>
+            <a:off x="457200" y="960120"/>
+            <a:ext cx="11247120" cy="320040"/>
+          </a:xfrm>
+          <a:prstGeom prst="rect">
+            <a:avLst/>
+          </a:prstGeom>
+          <a:noFill/>
+        </p:spPr>
+        <p:txBody>
+          <a:bodyPr wrap="none">
+            <a:spAutoFit/>
+          </a:bodyPr>
+          <a:lstStyle/>
+          <a:p>
+            <a:pPr>
+              <a:defRPr sz="1300">
+                <a:solidFill>
+                  <a:srgbClr val="555555"/>
+                </a:solidFill>
+              </a:defRPr>
+            </a:pPr>
+            <a:r>
+              <a:t>Weekend: BOD + EOD; day max 4h only on trigger · Ops Manager approves roster</a:t>
+            </a:r>
+          </a:p>
+        </p:txBody>
+      </p:sp>
+      <p:sp>
+        <p:nvSpPr>
+          <p:cNvPr id="4" name="Oval 3"/>
+          <p:cNvSpPr/>
+          <p:nvPr/>
+        </p:nvSpPr>
+        <p:spPr>
+          <a:xfrm>
+            <a:off x="502920" y="1234440"/>
+            <a:ext cx="347472" cy="347472"/>
+          </a:xfrm>
+          <a:prstGeom prst="ellipse">
+            <a:avLst/>
+          </a:prstGeom>
+          <a:solidFill>
+            <a:srgbClr val="00A651"/>
+          </a:solidFill>
+          <a:ln>
+            <a:noFill/>
+          </a:ln>
+        </p:spPr>
+        <p:style>
+          <a:lnRef idx="1">
+            <a:schemeClr val="accent1"/>
+          </a:lnRef>
+          <a:fillRef idx="3">
+            <a:schemeClr val="accent1"/>
+          </a:fillRef>
+          <a:effectRef idx="2">
+            <a:schemeClr val="accent1"/>
+          </a:effectRef>
+          <a:fontRef idx="minor">
+            <a:schemeClr val="lt1"/>
+          </a:fontRef>
+        </p:style>
+        <p:txBody>
+          <a:bodyPr rtlCol="0" anchor="ctr"/>
+          <a:lstStyle/>
+          <a:p>
+            <a:pPr algn="l">
+              <a:defRPr sz="1100" b="1">
+                <a:solidFill>
+                  <a:srgbClr val="FFFFFF"/>
+                </a:solidFill>
+              </a:defRPr>
+            </a:pPr>
+            <a:r>
+              <a:t>1</a:t>
+            </a:r>
+          </a:p>
+        </p:txBody>
+      </p:sp>
+      <p:sp>
+        <p:nvSpPr>
+          <p:cNvPr id="5" name="TextBox 4"/>
+          <p:cNvSpPr txBox="1"/>
+          <p:nvPr/>
+        </p:nvSpPr>
+        <p:spPr>
+          <a:xfrm>
+            <a:off x="941832" y="1216152"/>
+            <a:ext cx="5394960" cy="502920"/>
+          </a:xfrm>
+          <a:prstGeom prst="rect">
+            <a:avLst/>
+          </a:prstGeom>
+          <a:noFill/>
+        </p:spPr>
+        <p:txBody>
+          <a:bodyPr wrap="square">
+            <a:spAutoFit/>
+          </a:bodyPr>
+          <a:lstStyle/>
+          <a:p>
+            <a:pPr>
+              <a:defRPr sz="1200"/>
+            </a:pPr>
+            <a:r>
+              <a:t>04:00 — Open BOD; handover from night shift (20:00–24:00 prior day)</a:t>
+            </a:r>
+          </a:p>
+        </p:txBody>
+      </p:sp>
+      <p:sp>
+        <p:nvSpPr>
+          <p:cNvPr id="6" name="Oval 5"/>
+          <p:cNvSpPr/>
+          <p:nvPr/>
+        </p:nvSpPr>
+        <p:spPr>
+          <a:xfrm>
+            <a:off x="502920" y="1892808"/>
+            <a:ext cx="347472" cy="347472"/>
+          </a:xfrm>
+          <a:prstGeom prst="ellipse">
+            <a:avLst/>
+          </a:prstGeom>
+          <a:solidFill>
+            <a:srgbClr val="00A651"/>
+          </a:solidFill>
+          <a:ln>
+            <a:noFill/>
+          </a:ln>
+        </p:spPr>
+        <p:style>
+          <a:lnRef idx="1">
+            <a:schemeClr val="accent1"/>
+          </a:lnRef>
+          <a:fillRef idx="3">
+            <a:schemeClr val="accent1"/>
+          </a:fillRef>
+          <a:effectRef idx="2">
+            <a:schemeClr val="accent1"/>
+          </a:effectRef>
+          <a:fontRef idx="minor">
+            <a:schemeClr val="lt1"/>
+          </a:fontRef>
+        </p:style>
+        <p:txBody>
+          <a:bodyPr rtlCol="0" anchor="ctr"/>
+          <a:lstStyle/>
+          <a:p>
+            <a:pPr algn="l">
+              <a:defRPr sz="1100" b="1">
+                <a:solidFill>
+                  <a:srgbClr val="FFFFFF"/>
+                </a:solidFill>
+              </a:defRPr>
+            </a:pPr>
+            <a:r>
+              <a:t>2</a:t>
+            </a:r>
+          </a:p>
+        </p:txBody>
+      </p:sp>
+      <p:sp>
+        <p:nvSpPr>
+          <p:cNvPr id="7" name="TextBox 6"/>
+          <p:cNvSpPr txBox="1"/>
+          <p:nvPr/>
+        </p:nvSpPr>
+        <p:spPr>
+          <a:xfrm>
+            <a:off x="941832" y="1874520"/>
+            <a:ext cx="5394960" cy="502920"/>
+          </a:xfrm>
+          <a:prstGeom prst="rect">
+            <a:avLst/>
+          </a:prstGeom>
+          <a:noFill/>
+        </p:spPr>
+        <p:txBody>
+          <a:bodyPr wrap="square">
+            <a:spAutoFit/>
+          </a:bodyPr>
+          <a:lstStyle/>
+          <a:p>
+            <a:pPr>
+              <a:defRPr sz="1200"/>
+            </a:pPr>
+            <a:r>
+              <a:t>Review overnight P1/P2 — none open or unowned</a:t>
+            </a:r>
+          </a:p>
+        </p:txBody>
+      </p:sp>
+      <p:sp>
+        <p:nvSpPr>
+          <p:cNvPr id="8" name="Oval 7"/>
+          <p:cNvSpPr/>
+          <p:nvPr/>
+        </p:nvSpPr>
+        <p:spPr>
+          <a:xfrm>
+            <a:off x="502920" y="2551176"/>
+            <a:ext cx="347472" cy="347472"/>
+          </a:xfrm>
+          <a:prstGeom prst="ellipse">
+            <a:avLst/>
+          </a:prstGeom>
+          <a:solidFill>
+            <a:srgbClr val="00A651"/>
+          </a:solidFill>
+          <a:ln>
+            <a:noFill/>
+          </a:ln>
+        </p:spPr>
+        <p:style>
+          <a:lnRef idx="1">
+            <a:schemeClr val="accent1"/>
+          </a:lnRef>
+          <a:fillRef idx="3">
+            <a:schemeClr val="accent1"/>
+          </a:fillRef>
+          <a:effectRef idx="2">
+            <a:schemeClr val="accent1"/>
+          </a:effectRef>
+          <a:fontRef idx="minor">
+            <a:schemeClr val="lt1"/>
+          </a:fontRef>
+        </p:style>
+        <p:txBody>
+          <a:bodyPr rtlCol="0" anchor="ctr"/>
+          <a:lstStyle/>
+          <a:p>
+            <a:pPr algn="l">
+              <a:defRPr sz="1100" b="1">
+                <a:solidFill>
+                  <a:srgbClr val="FFFFFF"/>
+                </a:solidFill>
+              </a:defRPr>
+            </a:pPr>
+            <a:r>
+              <a:t>3</a:t>
+            </a:r>
+          </a:p>
+        </p:txBody>
+      </p:sp>
+      <p:sp>
+        <p:nvSpPr>
+          <p:cNvPr id="9" name="TextBox 8"/>
+          <p:cNvSpPr txBox="1"/>
+          <p:nvPr/>
+        </p:nvSpPr>
+        <p:spPr>
+          <a:xfrm>
+            <a:off x="941832" y="2532888"/>
+            <a:ext cx="5394960" cy="502920"/>
+          </a:xfrm>
+          <a:prstGeom prst="rect">
+            <a:avLst/>
+          </a:prstGeom>
+          <a:noFill/>
+        </p:spPr>
+        <p:txBody>
+          <a:bodyPr wrap="square">
+            <a:spAutoFit/>
+          </a:bodyPr>
+          <a:lstStyle/>
+          <a:p>
+            <a:pPr>
+              <a:defRPr sz="1200"/>
+            </a:pPr>
+            <a:r>
+              <a:t>Confirm production health + overnight batch jobs complete</a:t>
+            </a:r>
+          </a:p>
+        </p:txBody>
+      </p:sp>
+      <p:sp>
+        <p:nvSpPr>
+          <p:cNvPr id="10" name="Oval 9"/>
+          <p:cNvSpPr/>
+          <p:nvPr/>
+        </p:nvSpPr>
+        <p:spPr>
+          <a:xfrm>
+            <a:off x="502920" y="3209544"/>
+            <a:ext cx="347472" cy="347472"/>
+          </a:xfrm>
+          <a:prstGeom prst="ellipse">
+            <a:avLst/>
+          </a:prstGeom>
+          <a:solidFill>
+            <a:srgbClr val="00A651"/>
+          </a:solidFill>
+          <a:ln>
+            <a:noFill/>
+          </a:ln>
+        </p:spPr>
+        <p:style>
+          <a:lnRef idx="1">
+            <a:schemeClr val="accent1"/>
+          </a:lnRef>
+          <a:fillRef idx="3">
+            <a:schemeClr val="accent1"/>
+          </a:fillRef>
+          <a:effectRef idx="2">
+            <a:schemeClr val="accent1"/>
+          </a:effectRef>
+          <a:fontRef idx="minor">
+            <a:schemeClr val="lt1"/>
+          </a:fontRef>
+        </p:style>
+        <p:txBody>
+          <a:bodyPr rtlCol="0" anchor="ctr"/>
+          <a:lstStyle/>
+          <a:p>
+            <a:pPr algn="l">
+              <a:defRPr sz="1100" b="1">
+                <a:solidFill>
+                  <a:srgbClr val="FFFFFF"/>
+                </a:solidFill>
+              </a:defRPr>
+            </a:pPr>
+            <a:r>
+              <a:t>4</a:t>
+            </a:r>
+          </a:p>
+        </p:txBody>
+      </p:sp>
+      <p:sp>
+        <p:nvSpPr>
+          <p:cNvPr id="11" name="TextBox 10"/>
+          <p:cNvSpPr txBox="1"/>
+          <p:nvPr/>
+        </p:nvSpPr>
+        <p:spPr>
+          <a:xfrm>
+            <a:off x="941832" y="3191256"/>
+            <a:ext cx="5394960" cy="502920"/>
+          </a:xfrm>
+          <a:prstGeom prst="rect">
+            <a:avLst/>
+          </a:prstGeom>
+          <a:noFill/>
+        </p:spPr>
+        <p:txBody>
+          <a:bodyPr wrap="square">
+            <a:spAutoFit/>
+          </a:bodyPr>
+          <a:lstStyle/>
+          <a:p>
+            <a:pPr>
+              <a:defRPr sz="1200"/>
+            </a:pPr>
+            <a:r>
+              <a:t>List releases today — CR approved? UAT linked?</a:t>
+            </a:r>
+          </a:p>
+        </p:txBody>
+      </p:sp>
+      <p:sp>
+        <p:nvSpPr>
+          <p:cNvPr id="12" name="Oval 11"/>
+          <p:cNvSpPr/>
+          <p:nvPr/>
+        </p:nvSpPr>
+        <p:spPr>
+          <a:xfrm>
+            <a:off x="502920" y="3867912"/>
+            <a:ext cx="347472" cy="347472"/>
+          </a:xfrm>
+          <a:prstGeom prst="ellipse">
+            <a:avLst/>
+          </a:prstGeom>
+          <a:solidFill>
+            <a:srgbClr val="00A651"/>
+          </a:solidFill>
+          <a:ln>
+            <a:noFill/>
+          </a:ln>
+        </p:spPr>
+        <p:style>
+          <a:lnRef idx="1">
+            <a:schemeClr val="accent1"/>
+          </a:lnRef>
+          <a:fillRef idx="3">
+            <a:schemeClr val="accent1"/>
+          </a:fillRef>
+          <a:effectRef idx="2">
+            <a:schemeClr val="accent1"/>
+          </a:effectRef>
+          <a:fontRef idx="minor">
+            <a:schemeClr val="lt1"/>
+          </a:fontRef>
+        </p:style>
+        <p:txBody>
+          <a:bodyPr rtlCol="0" anchor="ctr"/>
+          <a:lstStyle/>
+          <a:p>
+            <a:pPr algn="l">
+              <a:defRPr sz="1100" b="1">
+                <a:solidFill>
+                  <a:srgbClr val="FFFFFF"/>
+                </a:solidFill>
+              </a:defRPr>
+            </a:pPr>
+            <a:r>
+              <a:t>5</a:t>
+            </a:r>
+          </a:p>
+        </p:txBody>
+      </p:sp>
+      <p:sp>
+        <p:nvSpPr>
+          <p:cNvPr id="13" name="TextBox 12"/>
+          <p:cNvSpPr txBox="1"/>
+          <p:nvPr/>
+        </p:nvSpPr>
+        <p:spPr>
+          <a:xfrm>
+            <a:off x="941832" y="3849624"/>
+            <a:ext cx="5394960" cy="502920"/>
+          </a:xfrm>
+          <a:prstGeom prst="rect">
+            <a:avLst/>
+          </a:prstGeom>
+          <a:noFill/>
+        </p:spPr>
+        <p:txBody>
+          <a:bodyPr wrap="square">
+            <a:spAutoFit/>
+          </a:bodyPr>
+          <a:lstStyle/>
+          <a:p>
+            <a:pPr>
+              <a:defRPr sz="1200"/>
+            </a:pPr>
+            <a:r>
+              <a:t>CAB outcomes — failed deploy? Hypercare check</a:t>
+            </a:r>
+          </a:p>
+        </p:txBody>
+      </p:sp>
+      <p:sp>
+        <p:nvSpPr>
+          <p:cNvPr id="14" name="Oval 13"/>
+          <p:cNvSpPr/>
+          <p:nvPr/>
+        </p:nvSpPr>
+        <p:spPr>
+          <a:xfrm>
+            <a:off x="6263640" y="1234440"/>
+            <a:ext cx="347472" cy="347472"/>
+          </a:xfrm>
+          <a:prstGeom prst="ellipse">
+            <a:avLst/>
+          </a:prstGeom>
+          <a:solidFill>
+            <a:srgbClr val="00A651"/>
+          </a:solidFill>
+          <a:ln>
+            <a:noFill/>
+          </a:ln>
+        </p:spPr>
+        <p:style>
+          <a:lnRef idx="1">
+            <a:schemeClr val="accent1"/>
+          </a:lnRef>
+          <a:fillRef idx="3">
+            <a:schemeClr val="accent1"/>
+          </a:fillRef>
+          <a:effectRef idx="2">
+            <a:schemeClr val="accent1"/>
+          </a:effectRef>
+          <a:fontRef idx="minor">
+            <a:schemeClr val="lt1"/>
+          </a:fontRef>
+        </p:style>
+        <p:txBody>
+          <a:bodyPr rtlCol="0" anchor="ctr"/>
+          <a:lstStyle/>
+          <a:p>
+            <a:pPr algn="l">
+              <a:defRPr sz="1100" b="1">
+                <a:solidFill>
+                  <a:srgbClr val="FFFFFF"/>
+                </a:solidFill>
+              </a:defRPr>
+            </a:pPr>
+            <a:r>
+              <a:t>6</a:t>
+            </a:r>
+          </a:p>
+        </p:txBody>
+      </p:sp>
+      <p:sp>
+        <p:nvSpPr>
+          <p:cNvPr id="15" name="TextBox 14"/>
+          <p:cNvSpPr txBox="1"/>
+          <p:nvPr/>
+        </p:nvSpPr>
+        <p:spPr>
+          <a:xfrm>
+            <a:off x="6702552" y="1216152"/>
+            <a:ext cx="5394960" cy="502920"/>
+          </a:xfrm>
+          <a:prstGeom prst="rect">
+            <a:avLst/>
+          </a:prstGeom>
+          <a:noFill/>
+        </p:spPr>
+        <p:txBody>
+          <a:bodyPr wrap="square">
+            <a:spAutoFit/>
+          </a:bodyPr>
+          <a:lstStyle/>
+          <a:p>
+            <a:pPr>
+              <a:defRPr sz="1200"/>
+            </a:pPr>
+            <a:r>
+              <a:t>Wrong-bucket SR count; BRD queue &gt; 5 days? Escalate</a:t>
+            </a:r>
+          </a:p>
+        </p:txBody>
+      </p:sp>
+      <p:sp>
+        <p:nvSpPr>
+          <p:cNvPr id="16" name="Oval 15"/>
+          <p:cNvSpPr/>
+          <p:nvPr/>
+        </p:nvSpPr>
+        <p:spPr>
+          <a:xfrm>
+            <a:off x="6263640" y="1892808"/>
+            <a:ext cx="347472" cy="347472"/>
+          </a:xfrm>
+          <a:prstGeom prst="ellipse">
+            <a:avLst/>
+          </a:prstGeom>
+          <a:solidFill>
+            <a:srgbClr val="00A651"/>
+          </a:solidFill>
+          <a:ln>
+            <a:noFill/>
+          </a:ln>
+        </p:spPr>
+        <p:style>
+          <a:lnRef idx="1">
+            <a:schemeClr val="accent1"/>
+          </a:lnRef>
+          <a:fillRef idx="3">
+            <a:schemeClr val="accent1"/>
+          </a:fillRef>
+          <a:effectRef idx="2">
+            <a:schemeClr val="accent1"/>
+          </a:effectRef>
+          <a:fontRef idx="minor">
+            <a:schemeClr val="lt1"/>
+          </a:fontRef>
+        </p:style>
+        <p:txBody>
+          <a:bodyPr rtlCol="0" anchor="ctr"/>
+          <a:lstStyle/>
+          <a:p>
+            <a:pPr algn="l">
+              <a:defRPr sz="1100" b="1">
+                <a:solidFill>
+                  <a:srgbClr val="FFFFFF"/>
+                </a:solidFill>
+              </a:defRPr>
+            </a:pPr>
+            <a:r>
+              <a:t>7</a:t>
+            </a:r>
+          </a:p>
+        </p:txBody>
+      </p:sp>
+      <p:sp>
+        <p:nvSpPr>
+          <p:cNvPr id="17" name="TextBox 16"/>
+          <p:cNvSpPr txBox="1"/>
+          <p:nvPr/>
+        </p:nvSpPr>
+        <p:spPr>
+          <a:xfrm>
+            <a:off x="6702552" y="1874520"/>
+            <a:ext cx="5394960" cy="502920"/>
+          </a:xfrm>
+          <a:prstGeom prst="rect">
+            <a:avLst/>
+          </a:prstGeom>
+          <a:noFill/>
+        </p:spPr>
+        <p:txBody>
+          <a:bodyPr wrap="square">
+            <a:spAutoFit/>
+          </a:bodyPr>
+          <a:lstStyle/>
+          <a:p>
+            <a:pPr>
+              <a:defRPr sz="1200"/>
+            </a:pPr>
+            <a:r>
+              <a:t>07:30 — Confirm apps green for business user allocation</a:t>
+            </a:r>
+          </a:p>
+        </p:txBody>
+      </p:sp>
+      <p:sp>
+        <p:nvSpPr>
+          <p:cNvPr id="18" name="Oval 17"/>
+          <p:cNvSpPr/>
+          <p:nvPr/>
+        </p:nvSpPr>
+        <p:spPr>
+          <a:xfrm>
+            <a:off x="6263640" y="2551176"/>
+            <a:ext cx="347472" cy="347472"/>
+          </a:xfrm>
+          <a:prstGeom prst="ellipse">
+            <a:avLst/>
+          </a:prstGeom>
+          <a:solidFill>
+            <a:srgbClr val="00A651"/>
+          </a:solidFill>
+          <a:ln>
+            <a:noFill/>
+          </a:ln>
+        </p:spPr>
+        <p:style>
+          <a:lnRef idx="1">
+            <a:schemeClr val="accent1"/>
+          </a:lnRef>
+          <a:fillRef idx="3">
+            <a:schemeClr val="accent1"/>
+          </a:fillRef>
+          <a:effectRef idx="2">
+            <a:schemeClr val="accent1"/>
+          </a:effectRef>
+          <a:fontRef idx="minor">
+            <a:schemeClr val="lt1"/>
+          </a:fontRef>
+        </p:style>
+        <p:txBody>
+          <a:bodyPr rtlCol="0" anchor="ctr"/>
+          <a:lstStyle/>
+          <a:p>
+            <a:pPr algn="l">
+              <a:defRPr sz="1100" b="1">
+                <a:solidFill>
+                  <a:srgbClr val="FFFFFF"/>
+                </a:solidFill>
+              </a:defRPr>
+            </a:pPr>
+            <a:r>
+              <a:t>8</a:t>
+            </a:r>
+          </a:p>
+        </p:txBody>
+      </p:sp>
+      <p:sp>
+        <p:nvSpPr>
+          <p:cNvPr id="19" name="TextBox 18"/>
+          <p:cNvSpPr txBox="1"/>
+          <p:nvPr/>
+        </p:nvSpPr>
+        <p:spPr>
+          <a:xfrm>
+            <a:off x="6702552" y="2532888"/>
+            <a:ext cx="5394960" cy="502920"/>
+          </a:xfrm>
+          <a:prstGeom prst="rect">
+            <a:avLst/>
+          </a:prstGeom>
+          <a:noFill/>
+        </p:spPr>
+        <p:txBody>
+          <a:bodyPr wrap="square">
+            <a:spAutoFit/>
+          </a:bodyPr>
+          <a:lstStyle/>
+          <a:p>
+            <a:pPr>
+              <a:defRPr sz="1200"/>
+            </a:pPr>
+            <a:r>
+              <a:t>Weekend? Approve extended day roster only if data late / incident</a:t>
+            </a:r>
+          </a:p>
+        </p:txBody>
+      </p:sp>
+      <p:sp>
+        <p:nvSpPr>
+          <p:cNvPr id="20" name="Oval 19"/>
+          <p:cNvSpPr/>
+          <p:nvPr/>
+        </p:nvSpPr>
+        <p:spPr>
+          <a:xfrm>
+            <a:off x="6263640" y="3209544"/>
+            <a:ext cx="347472" cy="347472"/>
+          </a:xfrm>
+          <a:prstGeom prst="ellipse">
+            <a:avLst/>
+          </a:prstGeom>
+          <a:solidFill>
+            <a:srgbClr val="00A651"/>
+          </a:solidFill>
+          <a:ln>
+            <a:noFill/>
+          </a:ln>
+        </p:spPr>
+        <p:style>
+          <a:lnRef idx="1">
+            <a:schemeClr val="accent1"/>
+          </a:lnRef>
+          <a:fillRef idx="3">
+            <a:schemeClr val="accent1"/>
+          </a:fillRef>
+          <a:effectRef idx="2">
+            <a:schemeClr val="accent1"/>
+          </a:effectRef>
+          <a:fontRef idx="minor">
+            <a:schemeClr val="lt1"/>
+          </a:fontRef>
+        </p:style>
+        <p:txBody>
+          <a:bodyPr rtlCol="0" anchor="ctr"/>
+          <a:lstStyle/>
+          <a:p>
+            <a:pPr algn="l">
+              <a:defRPr sz="1100" b="1">
+                <a:solidFill>
+                  <a:srgbClr val="FFFFFF"/>
+                </a:solidFill>
+              </a:defRPr>
+            </a:pPr>
+            <a:r>
+              <a:t>9</a:t>
+            </a:r>
+          </a:p>
+        </p:txBody>
+      </p:sp>
+      <p:sp>
+        <p:nvSpPr>
+          <p:cNvPr id="21" name="TextBox 20"/>
+          <p:cNvSpPr txBox="1"/>
+          <p:nvPr/>
+        </p:nvSpPr>
+        <p:spPr>
+          <a:xfrm>
+            <a:off x="6702552" y="3191256"/>
+            <a:ext cx="5394960" cy="502920"/>
+          </a:xfrm>
+          <a:prstGeom prst="rect">
+            <a:avLst/>
+          </a:prstGeom>
+          <a:noFill/>
+        </p:spPr>
+        <p:txBody>
+          <a:bodyPr wrap="square">
+            <a:spAutoFit/>
+          </a:bodyPr>
+          <a:lstStyle/>
+          <a:p>
+            <a:pPr>
+              <a:defRPr sz="1200"/>
+            </a:pPr>
+            <a:r>
+              <a:t>08:00 — Publish BOD log; assign day-shift escalation path</a:t>
+            </a:r>
+          </a:p>
+        </p:txBody>
+      </p:sp>
+      <p:sp>
+        <p:nvSpPr>
+          <p:cNvPr id="22" name="Oval 21"/>
+          <p:cNvSpPr/>
+          <p:nvPr/>
+        </p:nvSpPr>
+        <p:spPr>
+          <a:xfrm>
+            <a:off x="6263640" y="3867912"/>
+            <a:ext cx="347472" cy="347472"/>
+          </a:xfrm>
+          <a:prstGeom prst="ellipse">
+            <a:avLst/>
+          </a:prstGeom>
+          <a:solidFill>
+            <a:srgbClr val="00A651"/>
+          </a:solidFill>
+          <a:ln>
+            <a:noFill/>
+          </a:ln>
+        </p:spPr>
+        <p:style>
+          <a:lnRef idx="1">
+            <a:schemeClr val="accent1"/>
+          </a:lnRef>
+          <a:fillRef idx="3">
+            <a:schemeClr val="accent1"/>
+          </a:fillRef>
+          <a:effectRef idx="2">
+            <a:schemeClr val="accent1"/>
+          </a:effectRef>
+          <a:fontRef idx="minor">
+            <a:schemeClr val="lt1"/>
+          </a:fontRef>
+        </p:style>
+        <p:txBody>
+          <a:bodyPr rtlCol="0" anchor="ctr"/>
+          <a:lstStyle/>
+          <a:p>
+            <a:pPr algn="l">
+              <a:defRPr sz="1100" b="1">
+                <a:solidFill>
+                  <a:srgbClr val="FFFFFF"/>
+                </a:solidFill>
+              </a:defRPr>
+            </a:pPr>
+            <a:r>
+              <a:t>10</a:t>
+            </a:r>
+          </a:p>
+        </p:txBody>
+      </p:sp>
+      <p:sp>
+        <p:nvSpPr>
+          <p:cNvPr id="23" name="TextBox 22"/>
+          <p:cNvSpPr txBox="1"/>
+          <p:nvPr/>
+        </p:nvSpPr>
+        <p:spPr>
+          <a:xfrm>
+            <a:off x="6702552" y="3849624"/>
+            <a:ext cx="5394960" cy="502920"/>
+          </a:xfrm>
+          <a:prstGeom prst="rect">
+            <a:avLst/>
+          </a:prstGeom>
+          <a:noFill/>
+        </p:spPr>
+        <p:txBody>
+          <a:bodyPr wrap="square">
+            <a:spAutoFit/>
+          </a:bodyPr>
+          <a:lstStyle/>
+          <a:p>
+            <a:pPr>
+              <a:defRPr sz="1200"/>
+            </a:pPr>
+            <a:r>
+              <a:t>08:30 — Day shift (08:30–17:30) assumes Service Desk lead</a:t>
             </a:r>
           </a:p>
         </p:txBody>
@@ -7165,69 +7921,1164 @@
           <a:lstStyle/>
           <a:p>
             <a:r>
-              <a:t>EOD Runbook — Day Shift Close 17:30</a:t>
-            </a:r>
-          </a:p>
-        </p:txBody>
-      </p:sp>
-      <p:sp>
-        <p:nvSpPr>
-          <p:cNvPr id="3" name="Content Placeholder 2"/>
-          <p:cNvSpPr>
-            <a:spLocks noGrp="1"/>
-          </p:cNvSpPr>
-          <p:nvPr>
-            <p:ph idx="1"/>
-          </p:nvPr>
-        </p:nvSpPr>
-        <p:spPr/>
-        <p:txBody>
-          <a:bodyPr/>
-          <a:lstStyle/>
-          <a:p>
-            <a:r>
-              <a:t>End of day shift (08:30–17:30) — handover to night (20:00–24:00):</a:t>
-            </a:r>
-          </a:p>
-          <a:p/>
-          <a:p>
-            <a:r>
-              <a:t>☐ All P1/P2 updated in ITSM (not stale)</a:t>
-            </a:r>
-          </a:p>
-          <a:p>
-            <a:r>
-              <a:t>☐ Open SRs — none unassigned past SLA</a:t>
-            </a:r>
-          </a:p>
-          <a:p>
-            <a:r>
-              <a:t>☐ Business-bucket redirects logged with reason</a:t>
-            </a:r>
-          </a:p>
-          <a:p>
-            <a:r>
-              <a:t>☐ Deployments today — post-deploy verify complete?</a:t>
-            </a:r>
-          </a:p>
-          <a:p>
-            <a:r>
-              <a:t>☐ Emergency changes — retro-BRD task opened?</a:t>
-            </a:r>
-          </a:p>
-          <a:p>
-            <a:r>
-              <a:t>☐ Handover note for night / on-call</a:t>
-            </a:r>
-          </a:p>
-          <a:p>
-            <a:r>
-              <a:t>☐ No informal prod changes via chat — audit sample</a:t>
-            </a:r>
-          </a:p>
-          <a:p>
-            <a:r>
-              <a:t>☐ Update Ops dashboard metrics (daily slice)</a:t>
+              <a:t>Org Chart — Ops &amp; Support Resourcing</a:t>
+            </a:r>
+          </a:p>
+        </p:txBody>
+      </p:sp>
+      <p:sp>
+        <p:nvSpPr>
+          <p:cNvPr id="3" name="TextBox 2"/>
+          <p:cNvSpPr txBox="1"/>
+          <p:nvPr/>
+        </p:nvSpPr>
+        <p:spPr>
+          <a:xfrm>
+            <a:off x="365760" y="960120"/>
+            <a:ext cx="11430000" cy="320040"/>
+          </a:xfrm>
+          <a:prstGeom prst="rect">
+            <a:avLst/>
+          </a:prstGeom>
+          <a:noFill/>
+        </p:spPr>
+        <p:txBody>
+          <a:bodyPr wrap="none">
+            <a:spAutoFit/>
+          </a:bodyPr>
+          <a:lstStyle/>
+          <a:p>
+            <a:pPr>
+              <a:defRPr sz="1300">
+                <a:solidFill>
+                  <a:srgbClr val="555555"/>
+                </a:solidFill>
+              </a:defRPr>
+            </a:pPr>
+            <a:r>
+              <a:t>Roster by work type — IT handles systems; business work is delegated back</a:t>
+            </a:r>
+          </a:p>
+        </p:txBody>
+      </p:sp>
+      <p:sp>
+        <p:nvSpPr>
+          <p:cNvPr id="4" name="Rounded Rectangle 3"/>
+          <p:cNvSpPr/>
+          <p:nvPr/>
+        </p:nvSpPr>
+        <p:spPr>
+          <a:xfrm>
+            <a:off x="3809847" y="1554480"/>
+            <a:ext cx="4572000" cy="640080"/>
+          </a:xfrm>
+          <a:prstGeom prst="roundRect">
+            <a:avLst/>
+          </a:prstGeom>
+          <a:solidFill>
+            <a:srgbClr val="1F4E79"/>
+          </a:solidFill>
+          <a:ln>
+            <a:solidFill>
+              <a:srgbClr val="FFFFFF"/>
+            </a:solidFill>
+          </a:ln>
+        </p:spPr>
+        <p:style>
+          <a:lnRef idx="1">
+            <a:schemeClr val="accent1"/>
+          </a:lnRef>
+          <a:fillRef idx="3">
+            <a:schemeClr val="accent1"/>
+          </a:fillRef>
+          <a:effectRef idx="2">
+            <a:schemeClr val="accent1"/>
+          </a:effectRef>
+          <a:fontRef idx="minor">
+            <a:schemeClr val="lt1"/>
+          </a:fontRef>
+        </p:style>
+        <p:txBody>
+          <a:bodyPr rtlCol="0" anchor="ctr" wrap="square"/>
+          <a:lstStyle/>
+          <a:p>
+            <a:pPr algn="l">
+              <a:defRPr sz="1200" b="1">
+                <a:solidFill>
+                  <a:srgbClr val="FFFFFF"/>
+                </a:solidFill>
+              </a:defRPr>
+            </a:pPr>
+            <a:r>
+              <a:t>IT Ops Manager</a:t>
+            </a:r>
+          </a:p>
+        </p:txBody>
+      </p:sp>
+      <p:cxnSp>
+        <p:nvCxnSpPr>
+          <p:cNvPr id="5" name="Connector 4"/>
+          <p:cNvCxnSpPr/>
+          <p:nvPr/>
+        </p:nvCxnSpPr>
+        <p:spPr>
+          <a:xfrm flipH="1">
+            <a:off x="2123389" y="2194560"/>
+            <a:ext cx="3972458" cy="548640"/>
+          </a:xfrm>
+          <a:prstGeom prst="line">
+            <a:avLst/>
+          </a:prstGeom>
+          <a:ln w="19050">
+            <a:solidFill>
+              <a:srgbClr val="808080"/>
+            </a:solidFill>
+          </a:ln>
+        </p:spPr>
+        <p:style>
+          <a:lnRef idx="2">
+            <a:schemeClr val="accent1"/>
+          </a:lnRef>
+          <a:fillRef idx="0">
+            <a:schemeClr val="accent1"/>
+          </a:fillRef>
+          <a:effectRef idx="1">
+            <a:schemeClr val="accent1"/>
+          </a:effectRef>
+          <a:fontRef idx="minor">
+            <a:schemeClr val="tx1"/>
+          </a:fontRef>
+        </p:style>
+      </p:cxnSp>
+      <p:sp>
+        <p:nvSpPr>
+          <p:cNvPr id="6" name="Rounded Rectangle 5"/>
+          <p:cNvSpPr/>
+          <p:nvPr/>
+        </p:nvSpPr>
+        <p:spPr>
+          <a:xfrm>
+            <a:off x="274320" y="2743200"/>
+            <a:ext cx="3698138" cy="594360"/>
+          </a:xfrm>
+          <a:prstGeom prst="roundRect">
+            <a:avLst/>
+          </a:prstGeom>
+          <a:solidFill>
+            <a:srgbClr val="1F4E79"/>
+          </a:solidFill>
+          <a:ln>
+            <a:solidFill>
+              <a:srgbClr val="FFFFFF"/>
+            </a:solidFill>
+          </a:ln>
+        </p:spPr>
+        <p:style>
+          <a:lnRef idx="1">
+            <a:schemeClr val="accent1"/>
+          </a:lnRef>
+          <a:fillRef idx="3">
+            <a:schemeClr val="accent1"/>
+          </a:fillRef>
+          <a:effectRef idx="2">
+            <a:schemeClr val="accent1"/>
+          </a:effectRef>
+          <a:fontRef idx="minor">
+            <a:schemeClr val="lt1"/>
+          </a:fontRef>
+        </p:style>
+        <p:txBody>
+          <a:bodyPr rtlCol="0" anchor="ctr" wrap="square"/>
+          <a:lstStyle/>
+          <a:p>
+            <a:pPr algn="l">
+              <a:defRPr sz="1000" b="1">
+                <a:solidFill>
+                  <a:srgbClr val="FFFFFF"/>
+                </a:solidFill>
+              </a:defRPr>
+            </a:pPr>
+            <a:r>
+              <a:t>Service Desk Lead</a:t>
+            </a:r>
+          </a:p>
+        </p:txBody>
+      </p:sp>
+      <p:cxnSp>
+        <p:nvCxnSpPr>
+          <p:cNvPr id="7" name="Connector 6"/>
+          <p:cNvCxnSpPr/>
+          <p:nvPr/>
+        </p:nvCxnSpPr>
+        <p:spPr>
+          <a:xfrm>
+            <a:off x="2123389" y="3547872"/>
+            <a:ext cx="0" cy="109728"/>
+          </a:xfrm>
+          <a:prstGeom prst="line">
+            <a:avLst/>
+          </a:prstGeom>
+          <a:ln w="12700">
+            <a:solidFill>
+              <a:srgbClr val="B0B0B0"/>
+            </a:solidFill>
+          </a:ln>
+        </p:spPr>
+        <p:style>
+          <a:lnRef idx="2">
+            <a:schemeClr val="accent1"/>
+          </a:lnRef>
+          <a:fillRef idx="0">
+            <a:schemeClr val="accent1"/>
+          </a:fillRef>
+          <a:effectRef idx="1">
+            <a:schemeClr val="accent1"/>
+          </a:effectRef>
+          <a:fontRef idx="minor">
+            <a:schemeClr val="tx1"/>
+          </a:fontRef>
+        </p:style>
+      </p:cxnSp>
+      <p:sp>
+        <p:nvSpPr>
+          <p:cNvPr id="8" name="Rectangle 7"/>
+          <p:cNvSpPr/>
+          <p:nvPr/>
+        </p:nvSpPr>
+        <p:spPr>
+          <a:xfrm>
+            <a:off x="457200" y="3657600"/>
+            <a:ext cx="3332378" cy="502920"/>
+          </a:xfrm>
+          <a:prstGeom prst="rect">
+            <a:avLst/>
+          </a:prstGeom>
+          <a:solidFill>
+            <a:srgbClr val="F2F2F2"/>
+          </a:solidFill>
+          <a:ln>
+            <a:solidFill>
+              <a:srgbClr val="1F4E79"/>
+            </a:solidFill>
+          </a:ln>
+        </p:spPr>
+        <p:style>
+          <a:lnRef idx="1">
+            <a:schemeClr val="accent1"/>
+          </a:lnRef>
+          <a:fillRef idx="3">
+            <a:schemeClr val="accent1"/>
+          </a:fillRef>
+          <a:effectRef idx="2">
+            <a:schemeClr val="accent1"/>
+          </a:effectRef>
+          <a:fontRef idx="minor">
+            <a:schemeClr val="lt1"/>
+          </a:fontRef>
+        </p:style>
+        <p:txBody>
+          <a:bodyPr rtlCol="0" anchor="ctr" wrap="square"/>
+          <a:lstStyle/>
+          <a:p>
+            <a:pPr algn="l">
+              <a:defRPr sz="900">
+                <a:solidFill>
+                  <a:srgbClr val="333333"/>
+                </a:solidFill>
+              </a:defRPr>
+            </a:pPr>
+            <a:r>
+              <a:t>L1 catalog SR</a:t>
+            </a:r>
+          </a:p>
+        </p:txBody>
+      </p:sp>
+      <p:cxnSp>
+        <p:nvCxnSpPr>
+          <p:cNvPr id="9" name="Connector 8"/>
+          <p:cNvCxnSpPr/>
+          <p:nvPr/>
+        </p:nvCxnSpPr>
+        <p:spPr>
+          <a:xfrm>
+            <a:off x="2123389" y="4251959"/>
+            <a:ext cx="0" cy="109729"/>
+          </a:xfrm>
+          <a:prstGeom prst="line">
+            <a:avLst/>
+          </a:prstGeom>
+          <a:ln w="12700">
+            <a:solidFill>
+              <a:srgbClr val="B0B0B0"/>
+            </a:solidFill>
+          </a:ln>
+        </p:spPr>
+        <p:style>
+          <a:lnRef idx="2">
+            <a:schemeClr val="accent1"/>
+          </a:lnRef>
+          <a:fillRef idx="0">
+            <a:schemeClr val="accent1"/>
+          </a:fillRef>
+          <a:effectRef idx="1">
+            <a:schemeClr val="accent1"/>
+          </a:effectRef>
+          <a:fontRef idx="minor">
+            <a:schemeClr val="tx1"/>
+          </a:fontRef>
+        </p:style>
+      </p:cxnSp>
+      <p:sp>
+        <p:nvSpPr>
+          <p:cNvPr id="10" name="Rectangle 9"/>
+          <p:cNvSpPr/>
+          <p:nvPr/>
+        </p:nvSpPr>
+        <p:spPr>
+          <a:xfrm>
+            <a:off x="457200" y="4361688"/>
+            <a:ext cx="3332378" cy="502920"/>
+          </a:xfrm>
+          <a:prstGeom prst="rect">
+            <a:avLst/>
+          </a:prstGeom>
+          <a:solidFill>
+            <a:srgbClr val="F2F2F2"/>
+          </a:solidFill>
+          <a:ln>
+            <a:solidFill>
+              <a:srgbClr val="1F4E79"/>
+            </a:solidFill>
+          </a:ln>
+        </p:spPr>
+        <p:style>
+          <a:lnRef idx="1">
+            <a:schemeClr val="accent1"/>
+          </a:lnRef>
+          <a:fillRef idx="3">
+            <a:schemeClr val="accent1"/>
+          </a:fillRef>
+          <a:effectRef idx="2">
+            <a:schemeClr val="accent1"/>
+          </a:effectRef>
+          <a:fontRef idx="minor">
+            <a:schemeClr val="lt1"/>
+          </a:fontRef>
+        </p:style>
+        <p:txBody>
+          <a:bodyPr rtlCol="0" anchor="ctr" wrap="square"/>
+          <a:lstStyle/>
+          <a:p>
+            <a:pPr algn="l">
+              <a:defRPr sz="900">
+                <a:solidFill>
+                  <a:srgbClr val="333333"/>
+                </a:solidFill>
+              </a:defRPr>
+            </a:pPr>
+            <a:r>
+              <a:t>Bucket triage</a:t>
+            </a:r>
+          </a:p>
+        </p:txBody>
+      </p:sp>
+      <p:cxnSp>
+        <p:nvCxnSpPr>
+          <p:cNvPr id="11" name="Connector 10"/>
+          <p:cNvCxnSpPr/>
+          <p:nvPr/>
+        </p:nvCxnSpPr>
+        <p:spPr>
+          <a:xfrm>
+            <a:off x="2123389" y="4956047"/>
+            <a:ext cx="0" cy="109728"/>
+          </a:xfrm>
+          <a:prstGeom prst="line">
+            <a:avLst/>
+          </a:prstGeom>
+          <a:ln w="12700">
+            <a:solidFill>
+              <a:srgbClr val="B0B0B0"/>
+            </a:solidFill>
+          </a:ln>
+        </p:spPr>
+        <p:style>
+          <a:lnRef idx="2">
+            <a:schemeClr val="accent1"/>
+          </a:lnRef>
+          <a:fillRef idx="0">
+            <a:schemeClr val="accent1"/>
+          </a:fillRef>
+          <a:effectRef idx="1">
+            <a:schemeClr val="accent1"/>
+          </a:effectRef>
+          <a:fontRef idx="minor">
+            <a:schemeClr val="tx1"/>
+          </a:fontRef>
+        </p:style>
+      </p:cxnSp>
+      <p:sp>
+        <p:nvSpPr>
+          <p:cNvPr id="12" name="Rectangle 11"/>
+          <p:cNvSpPr/>
+          <p:nvPr/>
+        </p:nvSpPr>
+        <p:spPr>
+          <a:xfrm>
+            <a:off x="457200" y="5065775"/>
+            <a:ext cx="3332378" cy="502920"/>
+          </a:xfrm>
+          <a:prstGeom prst="rect">
+            <a:avLst/>
+          </a:prstGeom>
+          <a:solidFill>
+            <a:srgbClr val="F2F2F2"/>
+          </a:solidFill>
+          <a:ln>
+            <a:solidFill>
+              <a:srgbClr val="1F4E79"/>
+            </a:solidFill>
+          </a:ln>
+        </p:spPr>
+        <p:style>
+          <a:lnRef idx="1">
+            <a:schemeClr val="accent1"/>
+          </a:lnRef>
+          <a:fillRef idx="3">
+            <a:schemeClr val="accent1"/>
+          </a:fillRef>
+          <a:effectRef idx="2">
+            <a:schemeClr val="accent1"/>
+          </a:effectRef>
+          <a:fontRef idx="minor">
+            <a:schemeClr val="lt1"/>
+          </a:fontRef>
+        </p:style>
+        <p:txBody>
+          <a:bodyPr rtlCol="0" anchor="ctr" wrap="square"/>
+          <a:lstStyle/>
+          <a:p>
+            <a:pPr algn="l">
+              <a:defRPr sz="900">
+                <a:solidFill>
+                  <a:srgbClr val="333333"/>
+                </a:solidFill>
+              </a:defRPr>
+            </a:pPr>
+            <a:r>
+              <a:t>Redirect / KB</a:t>
+            </a:r>
+          </a:p>
+        </p:txBody>
+      </p:sp>
+      <p:cxnSp>
+        <p:nvCxnSpPr>
+          <p:cNvPr id="13" name="Connector 12"/>
+          <p:cNvCxnSpPr/>
+          <p:nvPr/>
+        </p:nvCxnSpPr>
+        <p:spPr>
+          <a:xfrm>
+            <a:off x="6095847" y="2194560"/>
+            <a:ext cx="0" cy="548640"/>
+          </a:xfrm>
+          <a:prstGeom prst="line">
+            <a:avLst/>
+          </a:prstGeom>
+          <a:ln w="19050">
+            <a:solidFill>
+              <a:srgbClr val="808080"/>
+            </a:solidFill>
+          </a:ln>
+        </p:spPr>
+        <p:style>
+          <a:lnRef idx="2">
+            <a:schemeClr val="accent1"/>
+          </a:lnRef>
+          <a:fillRef idx="0">
+            <a:schemeClr val="accent1"/>
+          </a:fillRef>
+          <a:effectRef idx="1">
+            <a:schemeClr val="accent1"/>
+          </a:effectRef>
+          <a:fontRef idx="minor">
+            <a:schemeClr val="tx1"/>
+          </a:fontRef>
+        </p:style>
+      </p:cxnSp>
+      <p:sp>
+        <p:nvSpPr>
+          <p:cNvPr id="14" name="Rounded Rectangle 13"/>
+          <p:cNvSpPr/>
+          <p:nvPr/>
+        </p:nvSpPr>
+        <p:spPr>
+          <a:xfrm>
+            <a:off x="4246778" y="2743200"/>
+            <a:ext cx="3698138" cy="594360"/>
+          </a:xfrm>
+          <a:prstGeom prst="roundRect">
+            <a:avLst/>
+          </a:prstGeom>
+          <a:solidFill>
+            <a:srgbClr val="2E75B6"/>
+          </a:solidFill>
+          <a:ln>
+            <a:solidFill>
+              <a:srgbClr val="FFFFFF"/>
+            </a:solidFill>
+          </a:ln>
+        </p:spPr>
+        <p:style>
+          <a:lnRef idx="1">
+            <a:schemeClr val="accent1"/>
+          </a:lnRef>
+          <a:fillRef idx="3">
+            <a:schemeClr val="accent1"/>
+          </a:fillRef>
+          <a:effectRef idx="2">
+            <a:schemeClr val="accent1"/>
+          </a:effectRef>
+          <a:fontRef idx="minor">
+            <a:schemeClr val="lt1"/>
+          </a:fontRef>
+        </p:style>
+        <p:txBody>
+          <a:bodyPr rtlCol="0" anchor="ctr" wrap="square"/>
+          <a:lstStyle/>
+          <a:p>
+            <a:pPr algn="l">
+              <a:defRPr sz="1000" b="1">
+                <a:solidFill>
+                  <a:srgbClr val="FFFFFF"/>
+                </a:solidFill>
+              </a:defRPr>
+            </a:pPr>
+            <a:r>
+              <a:t>Shift / On-call</a:t>
+            </a:r>
+          </a:p>
+        </p:txBody>
+      </p:sp>
+      <p:cxnSp>
+        <p:nvCxnSpPr>
+          <p:cNvPr id="15" name="Connector 14"/>
+          <p:cNvCxnSpPr/>
+          <p:nvPr/>
+        </p:nvCxnSpPr>
+        <p:spPr>
+          <a:xfrm>
+            <a:off x="6095847" y="3547872"/>
+            <a:ext cx="0" cy="109728"/>
+          </a:xfrm>
+          <a:prstGeom prst="line">
+            <a:avLst/>
+          </a:prstGeom>
+          <a:ln w="12700">
+            <a:solidFill>
+              <a:srgbClr val="B0B0B0"/>
+            </a:solidFill>
+          </a:ln>
+        </p:spPr>
+        <p:style>
+          <a:lnRef idx="2">
+            <a:schemeClr val="accent1"/>
+          </a:lnRef>
+          <a:fillRef idx="0">
+            <a:schemeClr val="accent1"/>
+          </a:fillRef>
+          <a:effectRef idx="1">
+            <a:schemeClr val="accent1"/>
+          </a:effectRef>
+          <a:fontRef idx="minor">
+            <a:schemeClr val="tx1"/>
+          </a:fontRef>
+        </p:style>
+      </p:cxnSp>
+      <p:sp>
+        <p:nvSpPr>
+          <p:cNvPr id="16" name="Rectangle 15"/>
+          <p:cNvSpPr/>
+          <p:nvPr/>
+        </p:nvSpPr>
+        <p:spPr>
+          <a:xfrm>
+            <a:off x="4429658" y="3657600"/>
+            <a:ext cx="3332378" cy="502920"/>
+          </a:xfrm>
+          <a:prstGeom prst="rect">
+            <a:avLst/>
+          </a:prstGeom>
+          <a:solidFill>
+            <a:srgbClr val="F2F2F2"/>
+          </a:solidFill>
+          <a:ln>
+            <a:solidFill>
+              <a:srgbClr val="2E75B6"/>
+            </a:solidFill>
+          </a:ln>
+        </p:spPr>
+        <p:style>
+          <a:lnRef idx="1">
+            <a:schemeClr val="accent1"/>
+          </a:lnRef>
+          <a:fillRef idx="3">
+            <a:schemeClr val="accent1"/>
+          </a:fillRef>
+          <a:effectRef idx="2">
+            <a:schemeClr val="accent1"/>
+          </a:effectRef>
+          <a:fontRef idx="minor">
+            <a:schemeClr val="lt1"/>
+          </a:fontRef>
+        </p:style>
+        <p:txBody>
+          <a:bodyPr rtlCol="0" anchor="ctr" wrap="square"/>
+          <a:lstStyle/>
+          <a:p>
+            <a:pPr algn="l">
+              <a:defRPr sz="900">
+                <a:solidFill>
+                  <a:srgbClr val="333333"/>
+                </a:solidFill>
+              </a:defRPr>
+            </a:pPr>
+            <a:r>
+              <a:t>Day 08:30–17:30</a:t>
+            </a:r>
+          </a:p>
+        </p:txBody>
+      </p:sp>
+      <p:cxnSp>
+        <p:nvCxnSpPr>
+          <p:cNvPr id="17" name="Connector 16"/>
+          <p:cNvCxnSpPr/>
+          <p:nvPr/>
+        </p:nvCxnSpPr>
+        <p:spPr>
+          <a:xfrm>
+            <a:off x="6095847" y="4251959"/>
+            <a:ext cx="0" cy="109729"/>
+          </a:xfrm>
+          <a:prstGeom prst="line">
+            <a:avLst/>
+          </a:prstGeom>
+          <a:ln w="12700">
+            <a:solidFill>
+              <a:srgbClr val="B0B0B0"/>
+            </a:solidFill>
+          </a:ln>
+        </p:spPr>
+        <p:style>
+          <a:lnRef idx="2">
+            <a:schemeClr val="accent1"/>
+          </a:lnRef>
+          <a:fillRef idx="0">
+            <a:schemeClr val="accent1"/>
+          </a:fillRef>
+          <a:effectRef idx="1">
+            <a:schemeClr val="accent1"/>
+          </a:effectRef>
+          <a:fontRef idx="minor">
+            <a:schemeClr val="tx1"/>
+          </a:fontRef>
+        </p:style>
+      </p:cxnSp>
+      <p:sp>
+        <p:nvSpPr>
+          <p:cNvPr id="18" name="Rectangle 17"/>
+          <p:cNvSpPr/>
+          <p:nvPr/>
+        </p:nvSpPr>
+        <p:spPr>
+          <a:xfrm>
+            <a:off x="4429658" y="4361688"/>
+            <a:ext cx="3332378" cy="502920"/>
+          </a:xfrm>
+          <a:prstGeom prst="rect">
+            <a:avLst/>
+          </a:prstGeom>
+          <a:solidFill>
+            <a:srgbClr val="F2F2F2"/>
+          </a:solidFill>
+          <a:ln>
+            <a:solidFill>
+              <a:srgbClr val="2E75B6"/>
+            </a:solidFill>
+          </a:ln>
+        </p:spPr>
+        <p:style>
+          <a:lnRef idx="1">
+            <a:schemeClr val="accent1"/>
+          </a:lnRef>
+          <a:fillRef idx="3">
+            <a:schemeClr val="accent1"/>
+          </a:fillRef>
+          <a:effectRef idx="2">
+            <a:schemeClr val="accent1"/>
+          </a:effectRef>
+          <a:fontRef idx="minor">
+            <a:schemeClr val="lt1"/>
+          </a:fontRef>
+        </p:style>
+        <p:txBody>
+          <a:bodyPr rtlCol="0" anchor="ctr" wrap="square"/>
+          <a:lstStyle/>
+          <a:p>
+            <a:pPr algn="l">
+              <a:defRPr sz="900">
+                <a:solidFill>
+                  <a:srgbClr val="333333"/>
+                </a:solidFill>
+              </a:defRPr>
+            </a:pPr>
+            <a:r>
+              <a:t>Night 20:00–24:00</a:t>
+            </a:r>
+          </a:p>
+        </p:txBody>
+      </p:sp>
+      <p:cxnSp>
+        <p:nvCxnSpPr>
+          <p:cNvPr id="19" name="Connector 18"/>
+          <p:cNvCxnSpPr/>
+          <p:nvPr/>
+        </p:nvCxnSpPr>
+        <p:spPr>
+          <a:xfrm>
+            <a:off x="6095847" y="4956047"/>
+            <a:ext cx="0" cy="109728"/>
+          </a:xfrm>
+          <a:prstGeom prst="line">
+            <a:avLst/>
+          </a:prstGeom>
+          <a:ln w="12700">
+            <a:solidFill>
+              <a:srgbClr val="B0B0B0"/>
+            </a:solidFill>
+          </a:ln>
+        </p:spPr>
+        <p:style>
+          <a:lnRef idx="2">
+            <a:schemeClr val="accent1"/>
+          </a:lnRef>
+          <a:fillRef idx="0">
+            <a:schemeClr val="accent1"/>
+          </a:fillRef>
+          <a:effectRef idx="1">
+            <a:schemeClr val="accent1"/>
+          </a:effectRef>
+          <a:fontRef idx="minor">
+            <a:schemeClr val="tx1"/>
+          </a:fontRef>
+        </p:style>
+      </p:cxnSp>
+      <p:sp>
+        <p:nvSpPr>
+          <p:cNvPr id="20" name="Rectangle 19"/>
+          <p:cNvSpPr/>
+          <p:nvPr/>
+        </p:nvSpPr>
+        <p:spPr>
+          <a:xfrm>
+            <a:off x="4429658" y="5065775"/>
+            <a:ext cx="3332378" cy="502920"/>
+          </a:xfrm>
+          <a:prstGeom prst="rect">
+            <a:avLst/>
+          </a:prstGeom>
+          <a:solidFill>
+            <a:srgbClr val="F2F2F2"/>
+          </a:solidFill>
+          <a:ln>
+            <a:solidFill>
+              <a:srgbClr val="2E75B6"/>
+            </a:solidFill>
+          </a:ln>
+        </p:spPr>
+        <p:style>
+          <a:lnRef idx="1">
+            <a:schemeClr val="accent1"/>
+          </a:lnRef>
+          <a:fillRef idx="3">
+            <a:schemeClr val="accent1"/>
+          </a:fillRef>
+          <a:effectRef idx="2">
+            <a:schemeClr val="accent1"/>
+          </a:effectRef>
+          <a:fontRef idx="minor">
+            <a:schemeClr val="lt1"/>
+          </a:fontRef>
+        </p:style>
+        <p:txBody>
+          <a:bodyPr rtlCol="0" anchor="ctr" wrap="square"/>
+          <a:lstStyle/>
+          <a:p>
+            <a:pPr algn="l">
+              <a:defRPr sz="900">
+                <a:solidFill>
+                  <a:srgbClr val="333333"/>
+                </a:solidFill>
+              </a:defRPr>
+            </a:pPr>
+            <a:r>
+              <a:t>Weekend on-call</a:t>
+            </a:r>
+          </a:p>
+        </p:txBody>
+      </p:sp>
+      <p:cxnSp>
+        <p:nvCxnSpPr>
+          <p:cNvPr id="21" name="Connector 20"/>
+          <p:cNvCxnSpPr/>
+          <p:nvPr/>
+        </p:nvCxnSpPr>
+        <p:spPr>
+          <a:xfrm>
+            <a:off x="6095847" y="2194560"/>
+            <a:ext cx="3972459" cy="548640"/>
+          </a:xfrm>
+          <a:prstGeom prst="line">
+            <a:avLst/>
+          </a:prstGeom>
+          <a:ln w="19050">
+            <a:solidFill>
+              <a:srgbClr val="808080"/>
+            </a:solidFill>
+          </a:ln>
+        </p:spPr>
+        <p:style>
+          <a:lnRef idx="2">
+            <a:schemeClr val="accent1"/>
+          </a:lnRef>
+          <a:fillRef idx="0">
+            <a:schemeClr val="accent1"/>
+          </a:fillRef>
+          <a:effectRef idx="1">
+            <a:schemeClr val="accent1"/>
+          </a:effectRef>
+          <a:fontRef idx="minor">
+            <a:schemeClr val="tx1"/>
+          </a:fontRef>
+        </p:style>
+      </p:cxnSp>
+      <p:sp>
+        <p:nvSpPr>
+          <p:cNvPr id="22" name="Rounded Rectangle 21"/>
+          <p:cNvSpPr/>
+          <p:nvPr/>
+        </p:nvSpPr>
+        <p:spPr>
+          <a:xfrm>
+            <a:off x="8219236" y="2743200"/>
+            <a:ext cx="3698138" cy="594360"/>
+          </a:xfrm>
+          <a:prstGeom prst="roundRect">
+            <a:avLst/>
+          </a:prstGeom>
+          <a:solidFill>
+            <a:srgbClr val="70AD47"/>
+          </a:solidFill>
+          <a:ln>
+            <a:solidFill>
+              <a:srgbClr val="FFFFFF"/>
+            </a:solidFill>
+          </a:ln>
+        </p:spPr>
+        <p:style>
+          <a:lnRef idx="1">
+            <a:schemeClr val="accent1"/>
+          </a:lnRef>
+          <a:fillRef idx="3">
+            <a:schemeClr val="accent1"/>
+          </a:fillRef>
+          <a:effectRef idx="2">
+            <a:schemeClr val="accent1"/>
+          </a:effectRef>
+          <a:fontRef idx="minor">
+            <a:schemeClr val="lt1"/>
+          </a:fontRef>
+        </p:style>
+        <p:txBody>
+          <a:bodyPr rtlCol="0" anchor="ctr" wrap="square"/>
+          <a:lstStyle/>
+          <a:p>
+            <a:pPr algn="l">
+              <a:defRPr sz="1000" b="1">
+                <a:solidFill>
+                  <a:srgbClr val="FFFFFF"/>
+                </a:solidFill>
+              </a:defRPr>
+            </a:pPr>
+            <a:r>
+              <a:t>Release &amp; Incident</a:t>
+            </a:r>
+          </a:p>
+        </p:txBody>
+      </p:sp>
+      <p:cxnSp>
+        <p:nvCxnSpPr>
+          <p:cNvPr id="23" name="Connector 22"/>
+          <p:cNvCxnSpPr/>
+          <p:nvPr/>
+        </p:nvCxnSpPr>
+        <p:spPr>
+          <a:xfrm>
+            <a:off x="10068306" y="3547872"/>
+            <a:ext cx="0" cy="109728"/>
+          </a:xfrm>
+          <a:prstGeom prst="line">
+            <a:avLst/>
+          </a:prstGeom>
+          <a:ln w="12700">
+            <a:solidFill>
+              <a:srgbClr val="B0B0B0"/>
+            </a:solidFill>
+          </a:ln>
+        </p:spPr>
+        <p:style>
+          <a:lnRef idx="2">
+            <a:schemeClr val="accent1"/>
+          </a:lnRef>
+          <a:fillRef idx="0">
+            <a:schemeClr val="accent1"/>
+          </a:fillRef>
+          <a:effectRef idx="1">
+            <a:schemeClr val="accent1"/>
+          </a:effectRef>
+          <a:fontRef idx="minor">
+            <a:schemeClr val="tx1"/>
+          </a:fontRef>
+        </p:style>
+      </p:cxnSp>
+      <p:sp>
+        <p:nvSpPr>
+          <p:cNvPr id="24" name="Rectangle 23"/>
+          <p:cNvSpPr/>
+          <p:nvPr/>
+        </p:nvSpPr>
+        <p:spPr>
+          <a:xfrm>
+            <a:off x="8402116" y="3657600"/>
+            <a:ext cx="3332378" cy="502920"/>
+          </a:xfrm>
+          <a:prstGeom prst="rect">
+            <a:avLst/>
+          </a:prstGeom>
+          <a:solidFill>
+            <a:srgbClr val="F2F2F2"/>
+          </a:solidFill>
+          <a:ln>
+            <a:solidFill>
+              <a:srgbClr val="70AD47"/>
+            </a:solidFill>
+          </a:ln>
+        </p:spPr>
+        <p:style>
+          <a:lnRef idx="1">
+            <a:schemeClr val="accent1"/>
+          </a:lnRef>
+          <a:fillRef idx="3">
+            <a:schemeClr val="accent1"/>
+          </a:fillRef>
+          <a:effectRef idx="2">
+            <a:schemeClr val="accent1"/>
+          </a:effectRef>
+          <a:fontRef idx="minor">
+            <a:schemeClr val="lt1"/>
+          </a:fontRef>
+        </p:style>
+        <p:txBody>
+          <a:bodyPr rtlCol="0" anchor="ctr" wrap="square"/>
+          <a:lstStyle/>
+          <a:p>
+            <a:pPr algn="l">
+              <a:defRPr sz="900">
+                <a:solidFill>
+                  <a:srgbClr val="333333"/>
+                </a:solidFill>
+              </a:defRPr>
+            </a:pPr>
+            <a:r>
+              <a:t>CAB / change</a:t>
+            </a:r>
+          </a:p>
+        </p:txBody>
+      </p:sp>
+      <p:cxnSp>
+        <p:nvCxnSpPr>
+          <p:cNvPr id="25" name="Connector 24"/>
+          <p:cNvCxnSpPr/>
+          <p:nvPr/>
+        </p:nvCxnSpPr>
+        <p:spPr>
+          <a:xfrm>
+            <a:off x="10068306" y="4251959"/>
+            <a:ext cx="0" cy="109729"/>
+          </a:xfrm>
+          <a:prstGeom prst="line">
+            <a:avLst/>
+          </a:prstGeom>
+          <a:ln w="12700">
+            <a:solidFill>
+              <a:srgbClr val="B0B0B0"/>
+            </a:solidFill>
+          </a:ln>
+        </p:spPr>
+        <p:style>
+          <a:lnRef idx="2">
+            <a:schemeClr val="accent1"/>
+          </a:lnRef>
+          <a:fillRef idx="0">
+            <a:schemeClr val="accent1"/>
+          </a:fillRef>
+          <a:effectRef idx="1">
+            <a:schemeClr val="accent1"/>
+          </a:effectRef>
+          <a:fontRef idx="minor">
+            <a:schemeClr val="tx1"/>
+          </a:fontRef>
+        </p:style>
+      </p:cxnSp>
+      <p:sp>
+        <p:nvSpPr>
+          <p:cNvPr id="26" name="Rectangle 25"/>
+          <p:cNvSpPr/>
+          <p:nvPr/>
+        </p:nvSpPr>
+        <p:spPr>
+          <a:xfrm>
+            <a:off x="8402116" y="4361688"/>
+            <a:ext cx="3332378" cy="502920"/>
+          </a:xfrm>
+          <a:prstGeom prst="rect">
+            <a:avLst/>
+          </a:prstGeom>
+          <a:solidFill>
+            <a:srgbClr val="F2F2F2"/>
+          </a:solidFill>
+          <a:ln>
+            <a:solidFill>
+              <a:srgbClr val="70AD47"/>
+            </a:solidFill>
+          </a:ln>
+        </p:spPr>
+        <p:style>
+          <a:lnRef idx="1">
+            <a:schemeClr val="accent1"/>
+          </a:lnRef>
+          <a:fillRef idx="3">
+            <a:schemeClr val="accent1"/>
+          </a:fillRef>
+          <a:effectRef idx="2">
+            <a:schemeClr val="accent1"/>
+          </a:effectRef>
+          <a:fontRef idx="minor">
+            <a:schemeClr val="lt1"/>
+          </a:fontRef>
+        </p:style>
+        <p:txBody>
+          <a:bodyPr rtlCol="0" anchor="ctr" wrap="square"/>
+          <a:lstStyle/>
+          <a:p>
+            <a:pPr algn="l">
+              <a:defRPr sz="900">
+                <a:solidFill>
+                  <a:srgbClr val="333333"/>
+                </a:solidFill>
+              </a:defRPr>
+            </a:pPr>
+            <a:r>
+              <a:t>Incident commander</a:t>
+            </a:r>
+          </a:p>
+        </p:txBody>
+      </p:sp>
+      <p:cxnSp>
+        <p:nvCxnSpPr>
+          <p:cNvPr id="27" name="Connector 26"/>
+          <p:cNvCxnSpPr/>
+          <p:nvPr/>
+        </p:nvCxnSpPr>
+        <p:spPr>
+          <a:xfrm>
+            <a:off x="10068306" y="4956047"/>
+            <a:ext cx="0" cy="109728"/>
+          </a:xfrm>
+          <a:prstGeom prst="line">
+            <a:avLst/>
+          </a:prstGeom>
+          <a:ln w="12700">
+            <a:solidFill>
+              <a:srgbClr val="B0B0B0"/>
+            </a:solidFill>
+          </a:ln>
+        </p:spPr>
+        <p:style>
+          <a:lnRef idx="2">
+            <a:schemeClr val="accent1"/>
+          </a:lnRef>
+          <a:fillRef idx="0">
+            <a:schemeClr val="accent1"/>
+          </a:fillRef>
+          <a:effectRef idx="1">
+            <a:schemeClr val="accent1"/>
+          </a:effectRef>
+          <a:fontRef idx="minor">
+            <a:schemeClr val="tx1"/>
+          </a:fontRef>
+        </p:style>
+      </p:cxnSp>
+      <p:sp>
+        <p:nvSpPr>
+          <p:cNvPr id="28" name="Rectangle 27"/>
+          <p:cNvSpPr/>
+          <p:nvPr/>
+        </p:nvSpPr>
+        <p:spPr>
+          <a:xfrm>
+            <a:off x="8402116" y="5065775"/>
+            <a:ext cx="3332378" cy="502920"/>
+          </a:xfrm>
+          <a:prstGeom prst="rect">
+            <a:avLst/>
+          </a:prstGeom>
+          <a:solidFill>
+            <a:srgbClr val="F2F2F2"/>
+          </a:solidFill>
+          <a:ln>
+            <a:solidFill>
+              <a:srgbClr val="70AD47"/>
+            </a:solidFill>
+          </a:ln>
+        </p:spPr>
+        <p:style>
+          <a:lnRef idx="1">
+            <a:schemeClr val="accent1"/>
+          </a:lnRef>
+          <a:fillRef idx="3">
+            <a:schemeClr val="accent1"/>
+          </a:fillRef>
+          <a:effectRef idx="2">
+            <a:schemeClr val="accent1"/>
+          </a:effectRef>
+          <a:fontRef idx="minor">
+            <a:schemeClr val="lt1"/>
+          </a:fontRef>
+        </p:style>
+        <p:txBody>
+          <a:bodyPr rtlCol="0" anchor="ctr" wrap="square"/>
+          <a:lstStyle/>
+          <a:p>
+            <a:pPr algn="l">
+              <a:defRPr sz="900">
+                <a:solidFill>
+                  <a:srgbClr val="333333"/>
+                </a:solidFill>
+              </a:defRPr>
+            </a:pPr>
+            <a:r>
+              <a:t>Hypercare / Dev liaison</a:t>
             </a:r>
           </a:p>
         </p:txBody>
@@ -7266,7 +9117,7 @@
           <a:lstStyle/>
           <a:p>
             <a:r>
-              <a:t>BOM &amp; EOM — Monthly Rituals</a:t>
+              <a:t>System Monitoring — All Day</a:t>
             </a:r>
           </a:p>
         </p:txBody>
@@ -7287,43 +9138,49 @@
           <a:lstStyle/>
           <a:p>
             <a:r>
-              <a:t>BOM (1st business day, 60 min):</a:t>
-            </a:r>
-          </a:p>
-          <a:p>
-            <a:r>
-              <a:t>  Last month KPIs · BRD volume vs BA capacity · release calendar</a:t>
-            </a:r>
-          </a:p>
-          <a:p>
-            <a:r>
-              <a:t>  Incident trends · wrong-bucket training plan · CAB roster</a:t>
+              <a:t>Weekday: day shift (08:30–17:30) + night (20:00–24:00) on-call:</a:t>
             </a:r>
           </a:p>
           <a:p/>
           <a:p>
             <a:r>
-              <a:t>EOM (last business day, 60 min):</a:t>
-            </a:r>
-          </a:p>
-          <a:p>
-            <a:r>
-              <a:t>  Change freeze for critical systems · evidence pack sample</a:t>
-            </a:r>
-          </a:p>
-          <a:p>
-            <a:r>
-              <a:t>  Deploys without BRD = 0 · UAT before prod = 100%</a:t>
-            </a:r>
-          </a:p>
-          <a:p>
-            <a:r>
-              <a:t>  Incident summary to leadership · lessons learned top 3</a:t>
-            </a:r>
-          </a:p>
-          <a:p>
-            <a:r>
-              <a:t>  Wrong-bucket report to BU Heads</a:t>
+              <a:t>☐ Production health dashboard (green / amber / red)</a:t>
+            </a:r>
+          </a:p>
+          <a:p>
+            <a:r>
+              <a:t>☐ Alert queue — no unacknowledged critical alerts &gt; 15 min</a:t>
+            </a:r>
+          </a:p>
+          <a:p>
+            <a:r>
+              <a:t>☐ Batch / EOD jobs — lending, collections, GL cut-offs</a:t>
+            </a:r>
+          </a:p>
+          <a:p>
+            <a:r>
+              <a:t>☐ Integration queues — Finacle, FE ONLINE, POS, $NAP</a:t>
+            </a:r>
+          </a:p>
+          <a:p>
+            <a:r>
+              <a:t>☐ Hypercare releases — daily Sponsor check (T+1 to T+14)</a:t>
+            </a:r>
+          </a:p>
+          <a:p>
+            <a:r>
+              <a:t>☐ Capacity — CPU, disk, connection pools on critical paths</a:t>
+            </a:r>
+          </a:p>
+          <a:p>
+            <a:r>
+              <a:t>☐ Security — failed login spikes, WAF blocks (escalate IT-Security)</a:t>
+            </a:r>
+          </a:p>
+          <a:p/>
+          <a:p>
+            <a:r>
+              <a:t>Amber → investigate. Red → incident process.</a:t>
             </a:r>
           </a:p>
         </p:txBody>
@@ -7362,7 +9219,7 @@
           <a:lstStyle/>
           <a:p>
             <a:r>
-              <a:t>Post-Mortem &amp; Lessons Learned</a:t>
+              <a:t>EOD Runbook — Day Shift Close 17:30</a:t>
             </a:r>
           </a:p>
         </p:txBody>
@@ -7383,34 +9240,48 @@
           <a:lstStyle/>
           <a:p>
             <a:r>
-              <a:t>Mandatory when: P1/P2 · failed deploy · repeat P3 (3× in 90 days)</a:t>
-            </a:r>
-          </a:p>
-          <a:p>
-            <a:r>
-              <a:t>  · emergency change · wrong-bucket caused customer impact</a:t>
+              <a:t>End of day shift (08:30–17:30) — handover to night (20:00–24:00):</a:t>
             </a:r>
           </a:p>
           <a:p/>
           <a:p>
             <a:r>
-              <a:t>Blameless focus: timeline of facts → root cause → SMART actions</a:t>
-            </a:r>
-          </a:p>
-          <a:p>
-            <a:r>
-              <a:t>Separate: IT systems failure vs business process vs handoff confusion</a:t>
-            </a:r>
-          </a:p>
-          <a:p/>
-          <a:p>
-            <a:r>
-              <a:t>Distribute lessons to: Service Desk KB · BU newsletter · Dev retro</a:t>
-            </a:r>
-          </a:p>
-          <a:p>
-            <a:r>
-              <a:t>  · EOM leadership pack · quarterly audit</a:t>
+              <a:t>☐ All P1/P2 updated in ITSM (not stale)</a:t>
+            </a:r>
+          </a:p>
+          <a:p>
+            <a:r>
+              <a:t>☐ Open SRs — none unassigned past SLA</a:t>
+            </a:r>
+          </a:p>
+          <a:p>
+            <a:r>
+              <a:t>☐ Business-bucket redirects logged with reason</a:t>
+            </a:r>
+          </a:p>
+          <a:p>
+            <a:r>
+              <a:t>☐ Deployments today — post-deploy verify complete?</a:t>
+            </a:r>
+          </a:p>
+          <a:p>
+            <a:r>
+              <a:t>☐ Emergency changes — retro-BRD task opened?</a:t>
+            </a:r>
+          </a:p>
+          <a:p>
+            <a:r>
+              <a:t>☐ Handover note for night / on-call</a:t>
+            </a:r>
+          </a:p>
+          <a:p>
+            <a:r>
+              <a:t>☐ No informal prod changes via chat — audit sample</a:t>
+            </a:r>
+          </a:p>
+          <a:p>
+            <a:r>
+              <a:t>☐ Update Ops dashboard metrics (daily slice)</a:t>
             </a:r>
           </a:p>
         </p:txBody>
@@ -7449,7 +9320,7 @@
           <a:lstStyle/>
           <a:p>
             <a:r>
-              <a:t>Ops Guardrails — Posture Card</a:t>
+              <a:t>BOM &amp; EOM — Monthly Rituals</a:t>
             </a:r>
           </a:p>
         </p:txBody>
@@ -7470,48 +9341,43 @@
           <a:lstStyle/>
           <a:p>
             <a:r>
-              <a:t>Post at Service Desk and war room:</a:t>
+              <a:t>BOM (1st business day, 60 min):</a:t>
+            </a:r>
+          </a:p>
+          <a:p>
+            <a:r>
+              <a:t>  Last month KPIs · BRD volume vs BA capacity · release calendar</a:t>
+            </a:r>
+          </a:p>
+          <a:p>
+            <a:r>
+              <a:t>  Incident trends · wrong-bucket training plan · CAB roster</a:t>
             </a:r>
           </a:p>
           <a:p/>
           <a:p>
             <a:r>
-              <a:t>1. Systems yes — business decisions no</a:t>
-            </a:r>
-          </a:p>
-          <a:p>
-            <a:r>
-              <a:t>2. No prod data fix without approved instruction + ticket</a:t>
-            </a:r>
-          </a:p>
-          <a:p>
-            <a:r>
-              <a:t>3. No rule change without BRD + FSD + deploy path</a:t>
-            </a:r>
-          </a:p>
-          <a:p>
-            <a:r>
-              <a:t>4. No import without maker-checker</a:t>
-            </a:r>
-          </a:p>
-          <a:p>
-            <a:r>
-              <a:t>5. Incidents — restore service first; data correction follows business</a:t>
-            </a:r>
-          </a:p>
-          <a:p>
-            <a:r>
-              <a:t>6. Email is not intake for changes</a:t>
-            </a:r>
-          </a:p>
-          <a:p>
-            <a:r>
-              <a:t>7. Document and redirect wrong-bucket — don't do business work silently</a:t>
-            </a:r>
-          </a:p>
-          <a:p>
-            <a:r>
-              <a:t>8. P1/P2 — post-mortem always</a:t>
+              <a:t>EOM (last business day, 60 min):</a:t>
+            </a:r>
+          </a:p>
+          <a:p>
+            <a:r>
+              <a:t>  Change freeze for critical systems · evidence pack sample</a:t>
+            </a:r>
+          </a:p>
+          <a:p>
+            <a:r>
+              <a:t>  Deploys without BRD = 0 · UAT before prod = 100%</a:t>
+            </a:r>
+          </a:p>
+          <a:p>
+            <a:r>
+              <a:t>  Incident summary to leadership · lessons learned top 3</a:t>
+            </a:r>
+          </a:p>
+          <a:p>
+            <a:r>
+              <a:t>  Wrong-bucket report to BU Heads</a:t>
             </a:r>
           </a:p>
         </p:txBody>
@@ -7652,7 +9518,7 @@
           <a:lstStyle/>
           <a:p>
             <a:r>
-              <a:t>Key KPIs — Ops Dashboard</a:t>
+              <a:t>Post-Mortem &amp; Lessons Learned</a:t>
             </a:r>
           </a:p>
         </p:txBody>
@@ -7673,37 +9539,34 @@
           <a:lstStyle/>
           <a:p>
             <a:r>
-              <a:t>Wrong-bucket SR rate              → trend down (EOD / EOM)</a:t>
-            </a:r>
-          </a:p>
-          <a:p>
-            <a:r>
-              <a:t>SR classified within 1 hr       → target ≥ 95%</a:t>
-            </a:r>
-          </a:p>
-          <a:p>
-            <a:r>
-              <a:t>P1 MTTR                         → per policy (EOM)</a:t>
-            </a:r>
-          </a:p>
-          <a:p>
-            <a:r>
-              <a:t>Post-mortems on time (P1/P2)    → target 100%</a:t>
-            </a:r>
-          </a:p>
-          <a:p>
-            <a:r>
-              <a:t>Deploys without BRD (month)     → target 0</a:t>
-            </a:r>
-          </a:p>
-          <a:p>
-            <a:r>
-              <a:t>Repeat incidents (same RCA)     → target 0 per quarter</a:t>
-            </a:r>
-          </a:p>
-          <a:p>
-            <a:r>
-              <a:t>IT data fixes without approval  → target 0</a:t>
+              <a:t>Mandatory when: P1/P2 · failed deploy · repeat P3 (3× in 90 days)</a:t>
+            </a:r>
+          </a:p>
+          <a:p>
+            <a:r>
+              <a:t>  · emergency change · wrong-bucket caused customer impact</a:t>
+            </a:r>
+          </a:p>
+          <a:p/>
+          <a:p>
+            <a:r>
+              <a:t>Blameless focus: timeline of facts → root cause → SMART actions</a:t>
+            </a:r>
+          </a:p>
+          <a:p>
+            <a:r>
+              <a:t>Separate: IT systems failure vs business process vs handoff confusion</a:t>
+            </a:r>
+          </a:p>
+          <a:p/>
+          <a:p>
+            <a:r>
+              <a:t>Distribute lessons to: Service Desk KB · BU newsletter · Dev retro</a:t>
+            </a:r>
+          </a:p>
+          <a:p>
+            <a:r>
+              <a:t>  · EOM leadership pack · quarterly audit</a:t>
             </a:r>
           </a:p>
         </p:txBody>
@@ -7742,7 +9605,7 @@
           <a:lstStyle/>
           <a:p>
             <a:r>
-              <a:t>Summary</a:t>
+              <a:t>Ops Guardrails — Posture Card</a:t>
             </a:r>
           </a:p>
         </p:txBody>
@@ -7763,33 +9626,48 @@
           <a:lstStyle/>
           <a:p>
             <a:r>
-              <a:t>WEEKDAY:  Night 20:00–24:00 · BOD 04:00–08:00 · Biz 07:30 · Day 08:30–17:30 · EOD 17:30</a:t>
-            </a:r>
-          </a:p>
-          <a:p>
-            <a:r>
-              <a:t>WEEKEND:  BOD + EOD only · day shift max 4h if data late or allocation/incident</a:t>
-            </a:r>
-          </a:p>
-          <a:p>
-            <a:r>
-              <a:t>ROSTER:   IT = catalog SR + systems · Business = cases, rules, features (self-service)</a:t>
-            </a:r>
-          </a:p>
-          <a:p>
-            <a:r>
-              <a:t>TICKETS:  Catalog = support only — NOT feature delivery · redirect wrong-bucket</a:t>
-            </a:r>
-          </a:p>
-          <a:p>
-            <a:r>
-              <a:t>MONTHLY:  BOM capacity · EOM audit · lessons learned</a:t>
+              <a:t>Post at Service Desk and war room:</a:t>
             </a:r>
           </a:p>
           <a:p/>
           <a:p>
             <a:r>
-              <a:t>IT fixes systems. Business owns cases, allocation, rules, and data decisions.</a:t>
+              <a:t>1. Systems yes — business decisions no</a:t>
+            </a:r>
+          </a:p>
+          <a:p>
+            <a:r>
+              <a:t>2. No prod data fix without approved instruction + ticket</a:t>
+            </a:r>
+          </a:p>
+          <a:p>
+            <a:r>
+              <a:t>3. No rule change without BRD + FSD + deploy path</a:t>
+            </a:r>
+          </a:p>
+          <a:p>
+            <a:r>
+              <a:t>4. No import without maker-checker</a:t>
+            </a:r>
+          </a:p>
+          <a:p>
+            <a:r>
+              <a:t>5. Incidents — restore service first; data correction follows business</a:t>
+            </a:r>
+          </a:p>
+          <a:p>
+            <a:r>
+              <a:t>6. Email is not intake for changes</a:t>
+            </a:r>
+          </a:p>
+          <a:p>
+            <a:r>
+              <a:t>7. Document and redirect wrong-bucket — don't do business work silently</a:t>
+            </a:r>
+          </a:p>
+          <a:p>
+            <a:r>
+              <a:t>8. P1/P2 — post-mortem always</a:t>
             </a:r>
           </a:p>
         </p:txBody>
@@ -7803,6 +9681,182 @@
 </file>
 
 <file path=ppt/slides/slide32.xml><?xml version="1.0" encoding="utf-8"?>
+<p:sld xmlns:a="http://schemas.openxmlformats.org/drawingml/2006/main" xmlns:p="http://schemas.openxmlformats.org/presentationml/2006/main" xmlns:r="http://schemas.openxmlformats.org/officeDocument/2006/relationships">
+  <p:cSld>
+    <p:spTree>
+      <p:nvGrpSpPr>
+        <p:cNvPr id="1" name=""/>
+        <p:cNvGrpSpPr/>
+        <p:nvPr/>
+      </p:nvGrpSpPr>
+      <p:grpSpPr/>
+      <p:sp>
+        <p:nvSpPr>
+          <p:cNvPr id="2" name="Title 1"/>
+          <p:cNvSpPr>
+            <a:spLocks noGrp="1"/>
+          </p:cNvSpPr>
+          <p:nvPr>
+            <p:ph type="title"/>
+          </p:nvPr>
+        </p:nvSpPr>
+        <p:spPr/>
+        <p:txBody>
+          <a:bodyPr/>
+          <a:lstStyle/>
+          <a:p>
+            <a:r>
+              <a:t>Key KPIs — Ops Dashboard</a:t>
+            </a:r>
+          </a:p>
+        </p:txBody>
+      </p:sp>
+      <p:sp>
+        <p:nvSpPr>
+          <p:cNvPr id="3" name="Content Placeholder 2"/>
+          <p:cNvSpPr>
+            <a:spLocks noGrp="1"/>
+          </p:cNvSpPr>
+          <p:nvPr>
+            <p:ph idx="1"/>
+          </p:nvPr>
+        </p:nvSpPr>
+        <p:spPr/>
+        <p:txBody>
+          <a:bodyPr/>
+          <a:lstStyle/>
+          <a:p>
+            <a:r>
+              <a:t>Wrong-bucket SR rate              → trend down (EOD / EOM)</a:t>
+            </a:r>
+          </a:p>
+          <a:p>
+            <a:r>
+              <a:t>SR classified within 1 hr       → target ≥ 95%</a:t>
+            </a:r>
+          </a:p>
+          <a:p>
+            <a:r>
+              <a:t>P1 MTTR                         → per policy (EOM)</a:t>
+            </a:r>
+          </a:p>
+          <a:p>
+            <a:r>
+              <a:t>Post-mortems on time (P1/P2)    → target 100%</a:t>
+            </a:r>
+          </a:p>
+          <a:p>
+            <a:r>
+              <a:t>Deploys without BRD (month)     → target 0</a:t>
+            </a:r>
+          </a:p>
+          <a:p>
+            <a:r>
+              <a:t>Repeat incidents (same RCA)     → target 0 per quarter</a:t>
+            </a:r>
+          </a:p>
+          <a:p>
+            <a:r>
+              <a:t>IT data fixes without approval  → target 0</a:t>
+            </a:r>
+          </a:p>
+        </p:txBody>
+      </p:sp>
+    </p:spTree>
+  </p:cSld>
+  <p:clrMapOvr>
+    <a:masterClrMapping/>
+  </p:clrMapOvr>
+</p:sld>
+</file>
+
+<file path=ppt/slides/slide33.xml><?xml version="1.0" encoding="utf-8"?>
+<p:sld xmlns:a="http://schemas.openxmlformats.org/drawingml/2006/main" xmlns:p="http://schemas.openxmlformats.org/presentationml/2006/main" xmlns:r="http://schemas.openxmlformats.org/officeDocument/2006/relationships">
+  <p:cSld>
+    <p:spTree>
+      <p:nvGrpSpPr>
+        <p:cNvPr id="1" name=""/>
+        <p:cNvGrpSpPr/>
+        <p:nvPr/>
+      </p:nvGrpSpPr>
+      <p:grpSpPr/>
+      <p:sp>
+        <p:nvSpPr>
+          <p:cNvPr id="2" name="Title 1"/>
+          <p:cNvSpPr>
+            <a:spLocks noGrp="1"/>
+          </p:cNvSpPr>
+          <p:nvPr>
+            <p:ph type="title"/>
+          </p:nvPr>
+        </p:nvSpPr>
+        <p:spPr/>
+        <p:txBody>
+          <a:bodyPr/>
+          <a:lstStyle/>
+          <a:p>
+            <a:r>
+              <a:t>Summary</a:t>
+            </a:r>
+          </a:p>
+        </p:txBody>
+      </p:sp>
+      <p:sp>
+        <p:nvSpPr>
+          <p:cNvPr id="3" name="Content Placeholder 2"/>
+          <p:cNvSpPr>
+            <a:spLocks noGrp="1"/>
+          </p:cNvSpPr>
+          <p:nvPr>
+            <p:ph idx="1"/>
+          </p:nvPr>
+        </p:nvSpPr>
+        <p:spPr/>
+        <p:txBody>
+          <a:bodyPr/>
+          <a:lstStyle/>
+          <a:p>
+            <a:r>
+              <a:t>WEEKDAY:  Night 20:00–24:00 · BOD 04:00–08:00 · Biz 07:30 · Day 08:30–17:30 · EOD 17:30</a:t>
+            </a:r>
+          </a:p>
+          <a:p>
+            <a:r>
+              <a:t>WEEKEND:  BOD + EOD only · day shift max 4h if data late or allocation/incident</a:t>
+            </a:r>
+          </a:p>
+          <a:p>
+            <a:r>
+              <a:t>ROSTER:   IT = catalog SR + systems · Business = cases, rules, features (self-service)</a:t>
+            </a:r>
+          </a:p>
+          <a:p>
+            <a:r>
+              <a:t>TICKETS:  Catalog = support only — NOT feature delivery · redirect wrong-bucket</a:t>
+            </a:r>
+          </a:p>
+          <a:p>
+            <a:r>
+              <a:t>MONTHLY:  BOM capacity · EOM audit · lessons learned</a:t>
+            </a:r>
+          </a:p>
+          <a:p/>
+          <a:p>
+            <a:r>
+              <a:t>IT fixes systems. Business owns cases, allocation, rules, and data decisions.</a:t>
+            </a:r>
+          </a:p>
+        </p:txBody>
+      </p:sp>
+    </p:spTree>
+  </p:cSld>
+  <p:clrMapOvr>
+    <a:masterClrMapping/>
+  </p:clrMapOvr>
+</p:sld>
+</file>
+
+<file path=ppt/slides/slide34.xml><?xml version="1.0" encoding="utf-8"?>
 <p:sld xmlns:a="http://schemas.openxmlformats.org/drawingml/2006/main" xmlns:p="http://schemas.openxmlformats.org/presentationml/2006/main" xmlns:r="http://schemas.openxmlformats.org/officeDocument/2006/relationships">
   <p:cSld>
     <p:spTree>
